--- a/static/ppts/G8_Sci_Interdependence.pptx
+++ b/static/ppts/G8_Sci_Interdependence.pptx
@@ -9,9 +9,13 @@
     <p:sldId id="257" r:id="rId3"/>
     <p:sldId id="258" r:id="rId4"/>
     <p:sldId id="259" r:id="rId5"/>
+    <p:sldId id="260" r:id="rId6"/>
+    <p:sldId id="261" r:id="rId7"/>
+    <p:sldId id="262" r:id="rId8"/>
+    <p:sldId id="263" r:id="rId9"/>
   </p:sldIdLst>
   <p:notesMasterIdLst>
-    <p:notesMasterId r:id="rId6"/>
+    <p:notesMasterId r:id="rId10"/>
   </p:notesMasterIdLst>
   <p:sldSz cx="9144000" cy="5143500"/>
   <p:notesSz cx="5143500" cy="9144000"/>
@@ -811,6 +815,358 @@
 </p:notes>
 </file>
 
+<file path=ppt/notesSlides/notesSlide5.xml><?xml version="1.0" encoding="utf-8"?>
+<p:notes xmlns:a="http://schemas.openxmlformats.org/drawingml/2006/main" xmlns:r="http://schemas.openxmlformats.org/officeDocument/2006/relationships" xmlns:p="http://schemas.openxmlformats.org/presentationml/2006/main">
+  <p:cSld>
+    <p:spTree>
+      <p:nvGrpSpPr>
+        <p:cNvPr id="1" name=""/>
+        <p:cNvGrpSpPr/>
+        <p:nvPr/>
+      </p:nvGrpSpPr>
+      <p:grpSpPr>
+        <a:xfrm>
+          <a:off x="0" y="0"/>
+          <a:ext cx="0" cy="0"/>
+          <a:chOff x="0" y="0"/>
+          <a:chExt cx="0" cy="0"/>
+        </a:xfrm>
+      </p:grpSpPr>
+      <p:sp>
+        <p:nvSpPr>
+          <p:cNvPr id="2" name="Slide Image Placeholder 1"/>
+          <p:cNvSpPr>
+            <a:spLocks noGrp="1" noRot="1" noChangeAspect="1"/>
+          </p:cNvSpPr>
+          <p:nvPr>
+            <p:ph type="sldImg"/>
+          </p:nvPr>
+        </p:nvSpPr>
+        <p:spPr/>
+      </p:sp>
+      <p:sp>
+        <p:nvSpPr>
+          <p:cNvPr id="3" name="Notes Placeholder 2"/>
+          <p:cNvSpPr>
+            <a:spLocks noGrp="1"/>
+          </p:cNvSpPr>
+          <p:nvPr>
+            <p:ph type="body" idx="1"/>
+          </p:nvPr>
+        </p:nvSpPr>
+        <p:spPr/>
+        <p:txBody>
+          <a:bodyPr/>
+          <a:lstStyle/>
+          <a:p>
+            <a:r>
+              <a:rPr lang="en-US" dirty="0"/>
+              <a:t/>
+            </a:r>
+            <a:endParaRPr lang="en-US" dirty="0"/>
+          </a:p>
+        </p:txBody>
+      </p:sp>
+      <p:sp>
+        <p:nvSpPr>
+          <p:cNvPr id="4" name="Slide Number Placeholder 3"/>
+          <p:cNvSpPr>
+            <a:spLocks noGrp="1"/>
+          </p:cNvSpPr>
+          <p:nvPr>
+            <p:ph type="sldNum" sz="quarter" idx="10"/>
+          </p:nvPr>
+        </p:nvSpPr>
+        <p:spPr/>
+        <p:txBody>
+          <a:bodyPr/>
+          <a:lstStyle/>
+          <a:p>
+            <a:fld id="{F7021451-1387-4CA6-816F-3879F97B5CBC}" type="slidenum">
+              <a:rPr lang="en-US"/>
+              <a:t>5</a:t>
+            </a:fld>
+            <a:endParaRPr lang="en-US"/>
+          </a:p>
+        </p:txBody>
+      </p:sp>
+    </p:spTree>
+    <p:extLst>
+      <p:ext uri="{BB962C8B-B14F-4D97-AF65-F5344CB8AC3E}">
+        <p14:creationId xmlns:p14="http://schemas.microsoft.com/office/powerpoint/2010/main" val="1024086991"/>
+      </p:ext>
+    </p:extLst>
+  </p:cSld>
+  <p:clrMapOvr>
+    <a:masterClrMapping/>
+  </p:clrMapOvr>
+</p:notes>
+</file>
+
+<file path=ppt/notesSlides/notesSlide6.xml><?xml version="1.0" encoding="utf-8"?>
+<p:notes xmlns:a="http://schemas.openxmlformats.org/drawingml/2006/main" xmlns:r="http://schemas.openxmlformats.org/officeDocument/2006/relationships" xmlns:p="http://schemas.openxmlformats.org/presentationml/2006/main">
+  <p:cSld>
+    <p:spTree>
+      <p:nvGrpSpPr>
+        <p:cNvPr id="1" name=""/>
+        <p:cNvGrpSpPr/>
+        <p:nvPr/>
+      </p:nvGrpSpPr>
+      <p:grpSpPr>
+        <a:xfrm>
+          <a:off x="0" y="0"/>
+          <a:ext cx="0" cy="0"/>
+          <a:chOff x="0" y="0"/>
+          <a:chExt cx="0" cy="0"/>
+        </a:xfrm>
+      </p:grpSpPr>
+      <p:sp>
+        <p:nvSpPr>
+          <p:cNvPr id="2" name="Slide Image Placeholder 1"/>
+          <p:cNvSpPr>
+            <a:spLocks noGrp="1" noRot="1" noChangeAspect="1"/>
+          </p:cNvSpPr>
+          <p:nvPr>
+            <p:ph type="sldImg"/>
+          </p:nvPr>
+        </p:nvSpPr>
+        <p:spPr/>
+      </p:sp>
+      <p:sp>
+        <p:nvSpPr>
+          <p:cNvPr id="3" name="Notes Placeholder 2"/>
+          <p:cNvSpPr>
+            <a:spLocks noGrp="1"/>
+          </p:cNvSpPr>
+          <p:nvPr>
+            <p:ph type="body" idx="1"/>
+          </p:nvPr>
+        </p:nvSpPr>
+        <p:spPr/>
+        <p:txBody>
+          <a:bodyPr/>
+          <a:lstStyle/>
+          <a:p>
+            <a:r>
+              <a:rPr lang="en-US" dirty="0"/>
+              <a:t/>
+            </a:r>
+            <a:endParaRPr lang="en-US" dirty="0"/>
+          </a:p>
+        </p:txBody>
+      </p:sp>
+      <p:sp>
+        <p:nvSpPr>
+          <p:cNvPr id="4" name="Slide Number Placeholder 3"/>
+          <p:cNvSpPr>
+            <a:spLocks noGrp="1"/>
+          </p:cNvSpPr>
+          <p:nvPr>
+            <p:ph type="sldNum" sz="quarter" idx="10"/>
+          </p:nvPr>
+        </p:nvSpPr>
+        <p:spPr/>
+        <p:txBody>
+          <a:bodyPr/>
+          <a:lstStyle/>
+          <a:p>
+            <a:fld id="{F7021451-1387-4CA6-816F-3879F97B5CBC}" type="slidenum">
+              <a:rPr lang="en-US"/>
+              <a:t>6</a:t>
+            </a:fld>
+            <a:endParaRPr lang="en-US"/>
+          </a:p>
+        </p:txBody>
+      </p:sp>
+    </p:spTree>
+    <p:extLst>
+      <p:ext uri="{BB962C8B-B14F-4D97-AF65-F5344CB8AC3E}">
+        <p14:creationId xmlns:p14="http://schemas.microsoft.com/office/powerpoint/2010/main" val="1024086991"/>
+      </p:ext>
+    </p:extLst>
+  </p:cSld>
+  <p:clrMapOvr>
+    <a:masterClrMapping/>
+  </p:clrMapOvr>
+</p:notes>
+</file>
+
+<file path=ppt/notesSlides/notesSlide7.xml><?xml version="1.0" encoding="utf-8"?>
+<p:notes xmlns:a="http://schemas.openxmlformats.org/drawingml/2006/main" xmlns:r="http://schemas.openxmlformats.org/officeDocument/2006/relationships" xmlns:p="http://schemas.openxmlformats.org/presentationml/2006/main">
+  <p:cSld>
+    <p:spTree>
+      <p:nvGrpSpPr>
+        <p:cNvPr id="1" name=""/>
+        <p:cNvGrpSpPr/>
+        <p:nvPr/>
+      </p:nvGrpSpPr>
+      <p:grpSpPr>
+        <a:xfrm>
+          <a:off x="0" y="0"/>
+          <a:ext cx="0" cy="0"/>
+          <a:chOff x="0" y="0"/>
+          <a:chExt cx="0" cy="0"/>
+        </a:xfrm>
+      </p:grpSpPr>
+      <p:sp>
+        <p:nvSpPr>
+          <p:cNvPr id="2" name="Slide Image Placeholder 1"/>
+          <p:cNvSpPr>
+            <a:spLocks noGrp="1" noRot="1" noChangeAspect="1"/>
+          </p:cNvSpPr>
+          <p:nvPr>
+            <p:ph type="sldImg"/>
+          </p:nvPr>
+        </p:nvSpPr>
+        <p:spPr/>
+      </p:sp>
+      <p:sp>
+        <p:nvSpPr>
+          <p:cNvPr id="3" name="Notes Placeholder 2"/>
+          <p:cNvSpPr>
+            <a:spLocks noGrp="1"/>
+          </p:cNvSpPr>
+          <p:nvPr>
+            <p:ph type="body" idx="1"/>
+          </p:nvPr>
+        </p:nvSpPr>
+        <p:spPr/>
+        <p:txBody>
+          <a:bodyPr/>
+          <a:lstStyle/>
+          <a:p>
+            <a:r>
+              <a:rPr lang="en-US" dirty="0"/>
+              <a:t/>
+            </a:r>
+            <a:endParaRPr lang="en-US" dirty="0"/>
+          </a:p>
+        </p:txBody>
+      </p:sp>
+      <p:sp>
+        <p:nvSpPr>
+          <p:cNvPr id="4" name="Slide Number Placeholder 3"/>
+          <p:cNvSpPr>
+            <a:spLocks noGrp="1"/>
+          </p:cNvSpPr>
+          <p:nvPr>
+            <p:ph type="sldNum" sz="quarter" idx="10"/>
+          </p:nvPr>
+        </p:nvSpPr>
+        <p:spPr/>
+        <p:txBody>
+          <a:bodyPr/>
+          <a:lstStyle/>
+          <a:p>
+            <a:fld id="{F7021451-1387-4CA6-816F-3879F97B5CBC}" type="slidenum">
+              <a:rPr lang="en-US"/>
+              <a:t>7</a:t>
+            </a:fld>
+            <a:endParaRPr lang="en-US"/>
+          </a:p>
+        </p:txBody>
+      </p:sp>
+    </p:spTree>
+    <p:extLst>
+      <p:ext uri="{BB962C8B-B14F-4D97-AF65-F5344CB8AC3E}">
+        <p14:creationId xmlns:p14="http://schemas.microsoft.com/office/powerpoint/2010/main" val="1024086991"/>
+      </p:ext>
+    </p:extLst>
+  </p:cSld>
+  <p:clrMapOvr>
+    <a:masterClrMapping/>
+  </p:clrMapOvr>
+</p:notes>
+</file>
+
+<file path=ppt/notesSlides/notesSlide8.xml><?xml version="1.0" encoding="utf-8"?>
+<p:notes xmlns:a="http://schemas.openxmlformats.org/drawingml/2006/main" xmlns:r="http://schemas.openxmlformats.org/officeDocument/2006/relationships" xmlns:p="http://schemas.openxmlformats.org/presentationml/2006/main">
+  <p:cSld>
+    <p:spTree>
+      <p:nvGrpSpPr>
+        <p:cNvPr id="1" name=""/>
+        <p:cNvGrpSpPr/>
+        <p:nvPr/>
+      </p:nvGrpSpPr>
+      <p:grpSpPr>
+        <a:xfrm>
+          <a:off x="0" y="0"/>
+          <a:ext cx="0" cy="0"/>
+          <a:chOff x="0" y="0"/>
+          <a:chExt cx="0" cy="0"/>
+        </a:xfrm>
+      </p:grpSpPr>
+      <p:sp>
+        <p:nvSpPr>
+          <p:cNvPr id="2" name="Slide Image Placeholder 1"/>
+          <p:cNvSpPr>
+            <a:spLocks noGrp="1" noRot="1" noChangeAspect="1"/>
+          </p:cNvSpPr>
+          <p:nvPr>
+            <p:ph type="sldImg"/>
+          </p:nvPr>
+        </p:nvSpPr>
+        <p:spPr/>
+      </p:sp>
+      <p:sp>
+        <p:nvSpPr>
+          <p:cNvPr id="3" name="Notes Placeholder 2"/>
+          <p:cNvSpPr>
+            <a:spLocks noGrp="1"/>
+          </p:cNvSpPr>
+          <p:nvPr>
+            <p:ph type="body" idx="1"/>
+          </p:nvPr>
+        </p:nvSpPr>
+        <p:spPr/>
+        <p:txBody>
+          <a:bodyPr/>
+          <a:lstStyle/>
+          <a:p>
+            <a:r>
+              <a:rPr lang="en-US" dirty="0"/>
+              <a:t/>
+            </a:r>
+            <a:endParaRPr lang="en-US" dirty="0"/>
+          </a:p>
+        </p:txBody>
+      </p:sp>
+      <p:sp>
+        <p:nvSpPr>
+          <p:cNvPr id="4" name="Slide Number Placeholder 3"/>
+          <p:cNvSpPr>
+            <a:spLocks noGrp="1"/>
+          </p:cNvSpPr>
+          <p:nvPr>
+            <p:ph type="sldNum" sz="quarter" idx="10"/>
+          </p:nvPr>
+        </p:nvSpPr>
+        <p:spPr/>
+        <p:txBody>
+          <a:bodyPr/>
+          <a:lstStyle/>
+          <a:p>
+            <a:fld id="{F7021451-1387-4CA6-816F-3879F97B5CBC}" type="slidenum">
+              <a:rPr lang="en-US"/>
+              <a:t>8</a:t>
+            </a:fld>
+            <a:endParaRPr lang="en-US"/>
+          </a:p>
+        </p:txBody>
+      </p:sp>
+    </p:spTree>
+    <p:extLst>
+      <p:ext uri="{BB962C8B-B14F-4D97-AF65-F5344CB8AC3E}">
+        <p14:creationId xmlns:p14="http://schemas.microsoft.com/office/powerpoint/2010/main" val="1024086991"/>
+      </p:ext>
+    </p:extLst>
+  </p:cSld>
+  <p:clrMapOvr>
+    <a:masterClrMapping/>
+  </p:clrMapOvr>
+</p:notes>
+</file>
+
 <file path=ppt/slideLayouts/slideLayout1.xml><?xml version="1.0" encoding="utf-8"?>
 <p:sldLayout xmlns:a="http://schemas.openxmlformats.org/drawingml/2006/main" xmlns:r="http://schemas.openxmlformats.org/officeDocument/2006/relationships" xmlns:p="http://schemas.openxmlformats.org/presentationml/2006/main" preserve="1">
   <p:cSld name="DEFAULT">
@@ -1170,7 +1526,7 @@
             <a:avLst/>
           </a:prstGeom>
           <a:solidFill>
-            <a:srgbClr val="1B2A4A"/>
+            <a:srgbClr val="E9C46A"/>
           </a:solidFill>
           <a:ln/>
         </p:spPr>
@@ -1202,7 +1558,7 @@
             <a:r>
               <a:rPr lang="en-US" sz="1400" b="1" spc="400" kern="0" dirty="0">
                 <a:solidFill>
-                  <a:srgbClr val="1B2A4A"/>
+                  <a:srgbClr val="E9C46A"/>
                 </a:solidFill>
                 <a:latin typeface="Calibri" pitchFamily="34" charset="0"/>
                 <a:ea typeface="Calibri" pitchFamily="34" charset="-122"/>
@@ -1247,7 +1603,7 @@
                 <a:ea typeface="Georgia" pitchFamily="34" charset="-122"/>
                 <a:cs typeface="Georgia" pitchFamily="34" charset="-120"/>
               </a:rPr>
-              <a:t>Interdependence &amp; Symbiosis</a:t>
+              <a:t>Interdependence</a:t>
             </a:r>
             <a:endParaRPr lang="en-US" sz="4000" dirty="0"/>
           </a:p>
@@ -1278,7 +1634,7 @@
               <a:buNone/>
             </a:pPr>
             <a:r>
-              <a:rPr lang="en-US" sz="1600" dirty="0">
+              <a:rPr lang="en-US" sz="1600" i="1" dirty="0">
                 <a:solidFill>
                   <a:srgbClr val="9B9690"/>
                 </a:solidFill>
@@ -1286,7 +1642,7 @@
                 <a:ea typeface="Calibri" pitchFamily="34" charset="-122"/>
                 <a:cs typeface="Calibri" pitchFamily="34" charset="-120"/>
               </a:rPr>
-              <a:t>How organisms depend on each other</a:t>
+              <a:t>How all living things depend on each other</a:t>
             </a:r>
             <a:endParaRPr lang="en-US" sz="1600" dirty="0"/>
           </a:p>
@@ -1317,7 +1673,7 @@
               <a:buNone/>
             </a:pPr>
             <a:r>
-              <a:rPr lang="en-US" sz="1100" dirty="0">
+              <a:rPr lang="en-US" sz="1200" dirty="0">
                 <a:solidFill>
                   <a:srgbClr val="6B6660"/>
                 </a:solidFill>
@@ -1325,9 +1681,9 @@
                 <a:ea typeface="Calibri" pitchFamily="34" charset="-122"/>
                 <a:cs typeface="Calibri" pitchFamily="34" charset="-120"/>
               </a:rPr>
-              <a:t>Mr Zocchi · NIS</a:t>
-            </a:r>
-            <a:endParaRPr lang="en-US" sz="1100" dirty="0"/>
+              <a:t>Mr Zocchi</a:t>
+            </a:r>
+            <a:endParaRPr lang="en-US" sz="1200" dirty="0"/>
           </a:p>
         </p:txBody>
       </p:sp>
@@ -1371,41 +1727,21 @@
             <a:avLst/>
           </a:prstGeom>
           <a:solidFill>
-            <a:srgbClr val="FAF8F5"/>
-          </a:solidFill>
-          <a:ln/>
-        </p:spPr>
-      </p:sp>
-      <p:sp>
-        <p:nvSpPr>
-          <p:cNvPr id="3" name="Shape 1"/>
-          <p:cNvSpPr/>
-          <p:nvPr/>
-        </p:nvSpPr>
-        <p:spPr>
-          <a:xfrm>
-            <a:off x="0" y="0"/>
-            <a:ext cx="9144000" cy="54864"/>
-          </a:xfrm>
-          <a:prstGeom prst="rect">
-            <a:avLst/>
-          </a:prstGeom>
-          <a:solidFill>
-            <a:srgbClr val="1B2A4A"/>
-          </a:solidFill>
-          <a:ln/>
-        </p:spPr>
-      </p:sp>
-      <p:sp>
-        <p:nvSpPr>
-          <p:cNvPr id="4" name="Text 2"/>
-          <p:cNvSpPr/>
-          <p:nvPr/>
-        </p:nvSpPr>
-        <p:spPr>
-          <a:xfrm>
-            <a:off x="640080" y="320040"/>
-            <a:ext cx="7863840" cy="640080"/>
+            <a:srgbClr val="111D35"/>
+          </a:solidFill>
+          <a:ln/>
+        </p:spPr>
+      </p:sp>
+      <p:sp>
+        <p:nvSpPr>
+          <p:cNvPr id="3" name="Text 1"/>
+          <p:cNvSpPr/>
+          <p:nvPr/>
+        </p:nvSpPr>
+        <p:spPr>
+          <a:xfrm>
+            <a:off x="6858000" y="182880"/>
+            <a:ext cx="2286000" cy="2743200"/>
           </a:xfrm>
           <a:prstGeom prst="rect">
             <a:avLst/>
@@ -1414,37 +1750,39 @@
           <a:ln/>
         </p:spPr>
         <p:txBody>
-          <a:bodyPr wrap="square" lIns="0" tIns="0" rIns="0" bIns="0" rtlCol="0" anchor="ctr"/>
-          <a:lstStyle/>
-          <a:p>
-            <a:pPr indent="0" marL="0">
+          <a:bodyPr wrap="square" rtlCol="0" anchor="ctr"/>
+          <a:lstStyle/>
+          <a:p>
+            <a:pPr algn="ctr" indent="0" marL="0">
               <a:buNone/>
             </a:pPr>
             <a:r>
-              <a:rPr lang="en-US" sz="2600" b="1" dirty="0">
-                <a:solidFill>
-                  <a:srgbClr val="1B2A4A"/>
+              <a:rPr lang="en-US" sz="16000" b="1" dirty="0">
+                <a:solidFill>
+                  <a:srgbClr val="E9C46A">
+                    <a:alpha val="80000"/>
+                  </a:srgbClr>
                 </a:solidFill>
                 <a:latin typeface="Georgia" pitchFamily="34" charset="0"/>
                 <a:ea typeface="Georgia" pitchFamily="34" charset="-122"/>
                 <a:cs typeface="Georgia" pitchFamily="34" charset="-120"/>
               </a:rPr>
-              <a:t>What Is Interdependence?</a:t>
-            </a:r>
-            <a:endParaRPr lang="en-US" sz="2600" dirty="0"/>
-          </a:p>
-        </p:txBody>
-      </p:sp>
-      <p:sp>
-        <p:nvSpPr>
-          <p:cNvPr id="5" name="Text 3"/>
-          <p:cNvSpPr/>
-          <p:nvPr/>
-        </p:nvSpPr>
-        <p:spPr>
-          <a:xfrm>
-            <a:off x="640080" y="1188720"/>
-            <a:ext cx="7863840" cy="3200400"/>
+              <a:t>?</a:t>
+            </a:r>
+            <a:endParaRPr lang="en-US" sz="16000" dirty="0"/>
+          </a:p>
+        </p:txBody>
+      </p:sp>
+      <p:sp>
+        <p:nvSpPr>
+          <p:cNvPr id="4" name="Text 2"/>
+          <p:cNvSpPr/>
+          <p:nvPr/>
+        </p:nvSpPr>
+        <p:spPr>
+          <a:xfrm>
+            <a:off x="731520" y="548640"/>
+            <a:ext cx="2743200" cy="365760"/>
           </a:xfrm>
           <a:prstGeom prst="rect">
             <a:avLst/>
@@ -1453,91 +1791,246 @@
           <a:ln/>
         </p:spPr>
         <p:txBody>
-          <a:bodyPr wrap="square" rtlCol="0" anchor="t"/>
-          <a:lstStyle/>
-          <a:p>
-            <a:pPr marL="342900" indent="-342900">
-              <a:lnSpc>
-                <a:spcPct val="140000"/>
-              </a:lnSpc>
-              <a:buSzPct val="100000"/>
-              <a:buChar char="•"/>
-            </a:pPr>
-            <a:r>
-              <a:rPr lang="en-US" sz="1500" dirty="0">
-                <a:solidFill>
-                  <a:srgbClr val="3D3A36"/>
+          <a:bodyPr wrap="square" rtlCol="0" anchor="ctr"/>
+          <a:lstStyle/>
+          <a:p>
+            <a:pPr indent="0" marL="0">
+              <a:buNone/>
+            </a:pPr>
+            <a:r>
+              <a:rPr lang="en-US" sz="1200" b="1" spc="400" kern="0" dirty="0">
+                <a:solidFill>
+                  <a:srgbClr val="E9C46A"/>
                 </a:solidFill>
                 <a:latin typeface="Calibri" pitchFamily="34" charset="0"/>
                 <a:ea typeface="Calibri" pitchFamily="34" charset="-122"/>
                 <a:cs typeface="Calibri" pitchFamily="34" charset="-120"/>
               </a:rPr>
-              <a:t>Organisms in an ecosystem depend on each other for survival.</a:t>
-            </a:r>
-            <a:endParaRPr lang="en-US" sz="1500" dirty="0"/>
-          </a:p>
-          <a:p>
-            <a:pPr marL="342900" indent="-342900">
-              <a:lnSpc>
-                <a:spcPct val="140000"/>
-              </a:lnSpc>
-              <a:buSzPct val="100000"/>
-              <a:buChar char="•"/>
-            </a:pPr>
-            <a:r>
-              <a:rPr lang="en-US" sz="1500" dirty="0">
-                <a:solidFill>
-                  <a:srgbClr val="3D3A36"/>
+              <a:t>INQUIRY</a:t>
+            </a:r>
+            <a:endParaRPr lang="en-US" sz="1200" dirty="0"/>
+          </a:p>
+        </p:txBody>
+      </p:sp>
+      <p:sp>
+        <p:nvSpPr>
+          <p:cNvPr id="5" name="Text 3"/>
+          <p:cNvSpPr/>
+          <p:nvPr/>
+        </p:nvSpPr>
+        <p:spPr>
+          <a:xfrm>
+            <a:off x="731520" y="1005840"/>
+            <a:ext cx="6858000" cy="1463040"/>
+          </a:xfrm>
+          <a:prstGeom prst="rect">
+            <a:avLst/>
+          </a:prstGeom>
+          <a:noFill/>
+          <a:ln/>
+        </p:spPr>
+        <p:txBody>
+          <a:bodyPr wrap="square" rtlCol="0" anchor="t"/>
+          <a:lstStyle/>
+          <a:p>
+            <a:pPr indent="0" marL="0">
+              <a:buNone/>
+            </a:pPr>
+            <a:r>
+              <a:rPr lang="en-US" sz="2800" b="1" dirty="0">
+                <a:solidFill>
+                  <a:srgbClr val="FFFFFF"/>
+                </a:solidFill>
+                <a:latin typeface="Georgia" pitchFamily="34" charset="0"/>
+                <a:ea typeface="Georgia" pitchFamily="34" charset="-122"/>
+                <a:cs typeface="Georgia" pitchFamily="34" charset="-120"/>
+              </a:rPr>
+              <a:t>When wolves were reintroduced to Yellowstone, even the RIVERS changed. How is that possible?</a:t>
+            </a:r>
+            <a:endParaRPr lang="en-US" sz="2800" dirty="0"/>
+          </a:p>
+        </p:txBody>
+      </p:sp>
+      <p:sp>
+        <p:nvSpPr>
+          <p:cNvPr id="6" name="Text 4"/>
+          <p:cNvSpPr/>
+          <p:nvPr/>
+        </p:nvSpPr>
+        <p:spPr>
+          <a:xfrm>
+            <a:off x="731520" y="2560320"/>
+            <a:ext cx="6858000" cy="548640"/>
+          </a:xfrm>
+          <a:prstGeom prst="rect">
+            <a:avLst/>
+          </a:prstGeom>
+          <a:noFill/>
+          <a:ln/>
+        </p:spPr>
+        <p:txBody>
+          <a:bodyPr wrap="square" rtlCol="0" anchor="ctr"/>
+          <a:lstStyle/>
+          <a:p>
+            <a:pPr indent="0" marL="0">
+              <a:buNone/>
+            </a:pPr>
+            <a:r>
+              <a:rPr lang="en-US" sz="1400" i="1" dirty="0">
+                <a:solidFill>
+                  <a:srgbClr val="9B9690"/>
                 </a:solidFill>
                 <a:latin typeface="Calibri" pitchFamily="34" charset="0"/>
                 <a:ea typeface="Calibri" pitchFamily="34" charset="-122"/>
                 <a:cs typeface="Calibri" pitchFamily="34" charset="-120"/>
               </a:rPr>
-              <a:t>Predators depend on prey. Prey depends on producers.</a:t>
-            </a:r>
-            <a:endParaRPr lang="en-US" sz="1500" dirty="0"/>
-          </a:p>
-          <a:p>
-            <a:pPr marL="342900" indent="-342900">
-              <a:lnSpc>
-                <a:spcPct val="140000"/>
-              </a:lnSpc>
-              <a:buSzPct val="100000"/>
-              <a:buChar char="•"/>
-            </a:pPr>
-            <a:r>
-              <a:rPr lang="en-US" sz="1500" dirty="0">
-                <a:solidFill>
-                  <a:srgbClr val="3D3A36"/>
+              <a:t>Removing or adding ONE species can transform an entire ecosystem.</a:t>
+            </a:r>
+            <a:endParaRPr lang="en-US" sz="1400" dirty="0"/>
+          </a:p>
+        </p:txBody>
+      </p:sp>
+      <p:sp>
+        <p:nvSpPr>
+          <p:cNvPr id="7" name="Shape 5"/>
+          <p:cNvSpPr/>
+          <p:nvPr/>
+        </p:nvSpPr>
+        <p:spPr>
+          <a:xfrm>
+            <a:off x="548640" y="3200400"/>
+            <a:ext cx="7315200" cy="1645920"/>
+          </a:xfrm>
+          <a:prstGeom prst="rect">
+            <a:avLst/>
+          </a:prstGeom>
+          <a:solidFill>
+            <a:srgbClr val="243660"/>
+          </a:solidFill>
+          <a:ln/>
+        </p:spPr>
+      </p:sp>
+      <p:sp>
+        <p:nvSpPr>
+          <p:cNvPr id="8" name="Text 6"/>
+          <p:cNvSpPr/>
+          <p:nvPr/>
+        </p:nvSpPr>
+        <p:spPr>
+          <a:xfrm>
+            <a:off x="731520" y="3246120"/>
+            <a:ext cx="3657600" cy="320040"/>
+          </a:xfrm>
+          <a:prstGeom prst="rect">
+            <a:avLst/>
+          </a:prstGeom>
+          <a:noFill/>
+          <a:ln/>
+        </p:spPr>
+        <p:txBody>
+          <a:bodyPr wrap="square" rtlCol="0" anchor="ctr"/>
+          <a:lstStyle/>
+          <a:p>
+            <a:pPr indent="0" marL="0">
+              <a:buNone/>
+            </a:pPr>
+            <a:r>
+              <a:rPr lang="en-US" sz="1100" b="1" spc="200" kern="0" dirty="0">
+                <a:solidFill>
+                  <a:srgbClr val="E9C46A"/>
                 </a:solidFill>
                 <a:latin typeface="Calibri" pitchFamily="34" charset="0"/>
                 <a:ea typeface="Calibri" pitchFamily="34" charset="-122"/>
                 <a:cs typeface="Calibri" pitchFamily="34" charset="-120"/>
               </a:rPr>
-              <a:t>If one species is removed, it affects the whole system.</a:t>
-            </a:r>
-            <a:endParaRPr lang="en-US" sz="1500" dirty="0"/>
-          </a:p>
+              <a:t>Think — Pair — Share</a:t>
+            </a:r>
+            <a:endParaRPr lang="en-US" sz="1100" dirty="0"/>
+          </a:p>
+        </p:txBody>
+      </p:sp>
+      <p:sp>
+        <p:nvSpPr>
+          <p:cNvPr id="9" name="Text 7"/>
+          <p:cNvSpPr/>
+          <p:nvPr/>
+        </p:nvSpPr>
+        <p:spPr>
+          <a:xfrm>
+            <a:off x="731520" y="3566160"/>
+            <a:ext cx="6949440" cy="1188720"/>
+          </a:xfrm>
+          <a:prstGeom prst="rect">
+            <a:avLst/>
+          </a:prstGeom>
+          <a:noFill/>
+          <a:ln/>
+        </p:spPr>
+        <p:txBody>
+          <a:bodyPr wrap="square" rtlCol="0" anchor="ctr"/>
+          <a:lstStyle/>
           <a:p>
             <a:pPr marL="342900" indent="-342900">
-              <a:lnSpc>
-                <a:spcPct val="140000"/>
-              </a:lnSpc>
+              <a:spcAft>
+                <a:spcPts val="600"/>
+              </a:spcAft>
               <a:buSzPct val="100000"/>
               <a:buChar char="•"/>
             </a:pPr>
             <a:r>
-              <a:rPr lang="en-US" sz="1500" dirty="0">
-                <a:solidFill>
-                  <a:srgbClr val="3D3A36"/>
+              <a:rPr lang="en-US" sz="1400" dirty="0">
+                <a:solidFill>
+                  <a:srgbClr val="E5E2DC"/>
                 </a:solidFill>
                 <a:latin typeface="Calibri" pitchFamily="34" charset="0"/>
                 <a:ea typeface="Calibri" pitchFamily="34" charset="-122"/>
                 <a:cs typeface="Calibri" pitchFamily="34" charset="-120"/>
               </a:rPr>
-              <a:t>This is why ecosystems are described as systems.</a:t>
-            </a:r>
-            <a:endParaRPr lang="en-US" sz="1500" dirty="0"/>
+              <a:t>How could a predator affect rivers?</a:t>
+            </a:r>
+            <a:endParaRPr lang="en-US" sz="1400" dirty="0"/>
+          </a:p>
+          <a:p>
+            <a:pPr marL="342900" indent="-342900">
+              <a:spcAft>
+                <a:spcPts val="600"/>
+              </a:spcAft>
+              <a:buSzPct val="100000"/>
+              <a:buChar char="•"/>
+            </a:pPr>
+            <a:r>
+              <a:rPr lang="en-US" sz="1400" dirty="0">
+                <a:solidFill>
+                  <a:srgbClr val="E5E2DC"/>
+                </a:solidFill>
+                <a:latin typeface="Calibri" pitchFamily="34" charset="0"/>
+                <a:ea typeface="Calibri" pitchFamily="34" charset="-122"/>
+                <a:cs typeface="Calibri" pitchFamily="34" charset="-120"/>
+              </a:rPr>
+              <a:t>What is the chain of events from wolf → river?</a:t>
+            </a:r>
+            <a:endParaRPr lang="en-US" sz="1400" dirty="0"/>
+          </a:p>
+          <a:p>
+            <a:pPr marL="342900" indent="-342900">
+              <a:spcAft>
+                <a:spcPts val="600"/>
+              </a:spcAft>
+              <a:buSzPct val="100000"/>
+              <a:buChar char="•"/>
+            </a:pPr>
+            <a:r>
+              <a:rPr lang="en-US" sz="1400" dirty="0">
+                <a:solidFill>
+                  <a:srgbClr val="E5E2DC"/>
+                </a:solidFill>
+                <a:latin typeface="Calibri" pitchFamily="34" charset="0"/>
+                <a:ea typeface="Calibri" pitchFamily="34" charset="-122"/>
+                <a:cs typeface="Calibri" pitchFamily="34" charset="-120"/>
+              </a:rPr>
+              <a:t>Could something similar happen in a Chinese ecosystem?</a:t>
+            </a:r>
+            <a:endParaRPr lang="en-US" sz="1400" dirty="0"/>
           </a:p>
         </p:txBody>
       </p:sp>
@@ -1552,6 +2045,13 @@
 <file path=ppt/slides/slide3.xml><?xml version="1.0" encoding="utf-8"?>
 <p:sld xmlns:a="http://schemas.openxmlformats.org/drawingml/2006/main" xmlns:r="http://schemas.openxmlformats.org/officeDocument/2006/relationships" xmlns:p="http://schemas.openxmlformats.org/presentationml/2006/main">
   <p:cSld name="Slide 3">
+    <p:bg>
+      <p:bgPr>
+        <a:solidFill>
+          <a:srgbClr val="FAF8F5"/>
+        </a:solidFill>
+      </p:bgPr>
+    </p:bg>
     <p:spTree>
       <p:nvGrpSpPr>
         <p:cNvPr id="1" name=""/>
@@ -1575,13 +2075,13 @@
         <p:spPr>
           <a:xfrm>
             <a:off x="0" y="0"/>
-            <a:ext cx="9144000" cy="5143500"/>
-          </a:xfrm>
-          <a:prstGeom prst="rect">
-            <a:avLst/>
-          </a:prstGeom>
-          <a:solidFill>
-            <a:srgbClr val="FAF8F5"/>
+            <a:ext cx="9144000" cy="822960"/>
+          </a:xfrm>
+          <a:prstGeom prst="rect">
+            <a:avLst/>
+          </a:prstGeom>
+          <a:solidFill>
+            <a:srgbClr val="FFFFFF"/>
           </a:solidFill>
           <a:ln/>
         </p:spPr>
@@ -1594,14 +2094,14 @@
         </p:nvSpPr>
         <p:spPr>
           <a:xfrm>
-            <a:off x="0" y="0"/>
-            <a:ext cx="9144000" cy="54864"/>
-          </a:xfrm>
-          <a:prstGeom prst="rect">
-            <a:avLst/>
-          </a:prstGeom>
-          <a:solidFill>
-            <a:srgbClr val="1B2A4A"/>
+            <a:off x="0" y="795528"/>
+            <a:ext cx="9144000" cy="27432"/>
+          </a:xfrm>
+          <a:prstGeom prst="rect">
+            <a:avLst/>
+          </a:prstGeom>
+          <a:solidFill>
+            <a:srgbClr val="E9C46A"/>
           </a:solidFill>
           <a:ln/>
         </p:spPr>
@@ -1614,8 +2114,8 @@
         </p:nvSpPr>
         <p:spPr>
           <a:xfrm>
-            <a:off x="640080" y="320040"/>
-            <a:ext cx="7863840" cy="548640"/>
+            <a:off x="640080" y="91440"/>
+            <a:ext cx="7863840" cy="640080"/>
           </a:xfrm>
           <a:prstGeom prst="rect">
             <a:avLst/>
@@ -1631,7 +2131,7 @@
               <a:buNone/>
             </a:pPr>
             <a:r>
-              <a:rPr lang="en-US" sz="2600" b="1" dirty="0">
+              <a:rPr lang="en-US" sz="2200" b="1" dirty="0">
                 <a:solidFill>
                   <a:srgbClr val="1B2A4A"/>
                 </a:solidFill>
@@ -1639,840 +2139,204 @@
                 <a:ea typeface="Georgia" pitchFamily="34" charset="-122"/>
                 <a:cs typeface="Georgia" pitchFamily="34" charset="-120"/>
               </a:rPr>
-              <a:t>Types of Symbiosis</a:t>
-            </a:r>
-            <a:endParaRPr lang="en-US" sz="2600" dirty="0"/>
-          </a:p>
-        </p:txBody>
-      </p:sp>
-      <p:graphicFrame>
-        <p:nvGraphicFramePr>
-          <p:cNvPr id="4" name="Table 0"/>
-          <p:cNvGraphicFramePr>
-            <a:graphicFrameLocks noGrp="1"/>
-          </p:cNvGraphicFramePr>
-          <p:nvPr>
-            <p:extLst>
-              <p:ext uri="{D42A27DB-BD31-4B8C-83A1-F6EECF244321}">
-                <p14:modId xmlns:p14="http://schemas.microsoft.com/office/powerpoint/2010/main" val="1579011935"/>
-              </p:ext>
-            </p:extLst>
-          </p:nvPr>
-        </p:nvGraphicFramePr>
-        <p:xfrm>
-          <a:off x="640080" y="1051560"/>
-          <a:ext cx="7863840" cy="914400"/>
-        </p:xfrm>
-        <a:graphic>
-          <a:graphicData uri="http://schemas.openxmlformats.org/drawingml/2006/table">
-            <a:tbl>
-              <a:tblPr/>
-              <a:tblGrid>
-                <a:gridCol w="2621280"/>
-                <a:gridCol w="2621280"/>
-                <a:gridCol w="2621280"/>
-              </a:tblGrid>
-              <a:tr h="502920">
-                <a:tc>
-                  <a:txBody>
-                    <a:bodyPr/>
-                    <a:lstStyle/>
-                    <a:p>
-                      <a:pPr indent="0" marL="0">
-                        <a:buNone/>
-                      </a:pPr>
-                      <a:r>
-                        <a:rPr lang="en-US" sz="1200" b="1" dirty="0">
-                          <a:solidFill>
-                            <a:srgbClr val="FFFFFF"/>
-                          </a:solidFill>
-                          <a:latin typeface="Calibri" pitchFamily="34" charset="0"/>
-                          <a:ea typeface="Calibri" pitchFamily="34" charset="-122"/>
-                          <a:cs typeface="Calibri" pitchFamily="34" charset="-120"/>
-                        </a:rPr>
-                        <a:t>Relationship</a:t>
-                      </a:r>
-                      <a:endParaRPr lang="en-US" sz="1200" dirty="0">
-                        <a:latin typeface="Calibri" charset="0"/>
-                        <a:ea typeface="Calibri" charset="0"/>
-                        <a:cs typeface="Calibri" charset="0"/>
-                      </a:endParaRPr>
-                    </a:p>
-                  </a:txBody>
-                  <a:tcPr marL="91440" marR="91440" marT="45720" marB="45720">
-                    <a:lnL w="6350" cap="flat" cmpd="sng" algn="ctr">
-                      <a:solidFill>
-                        <a:srgbClr val="E5E2DC"/>
-                      </a:solidFill>
-                      <a:prstDash val="solid"/>
-                      <a:round/>
-                      <a:headEnd type="none" w="med" len="med"/>
-                      <a:tailEnd type="none" w="med" len="med"/>
-                    </a:lnL>
-                    <a:lnR w="6350" cap="flat" cmpd="sng" algn="ctr">
-                      <a:solidFill>
-                        <a:srgbClr val="E5E2DC"/>
-                      </a:solidFill>
-                      <a:prstDash val="solid"/>
-                      <a:round/>
-                      <a:headEnd type="none" w="med" len="med"/>
-                      <a:tailEnd type="none" w="med" len="med"/>
-                    </a:lnR>
-                    <a:lnT w="6350" cap="flat" cmpd="sng" algn="ctr">
-                      <a:solidFill>
-                        <a:srgbClr val="E5E2DC"/>
-                      </a:solidFill>
-                      <a:prstDash val="solid"/>
-                      <a:round/>
-                      <a:headEnd type="none" w="med" len="med"/>
-                      <a:tailEnd type="none" w="med" len="med"/>
-                    </a:lnT>
-                    <a:lnB w="6350" cap="flat" cmpd="sng" algn="ctr">
-                      <a:solidFill>
-                        <a:srgbClr val="E5E2DC"/>
-                      </a:solidFill>
-                      <a:prstDash val="solid"/>
-                      <a:round/>
-                      <a:headEnd type="none" w="med" len="med"/>
-                      <a:tailEnd type="none" w="med" len="med"/>
-                    </a:lnB>
-                    <a:solidFill>
-                      <a:srgbClr val="1B2A4A"/>
-                    </a:solidFill>
-                  </a:tcPr>
-                </a:tc>
-                <a:tc>
-                  <a:txBody>
-                    <a:bodyPr/>
-                    <a:lstStyle/>
-                    <a:p>
-                      <a:pPr indent="0" marL="0">
-                        <a:buNone/>
-                      </a:pPr>
-                      <a:r>
-                        <a:rPr lang="en-US" sz="1200" b="1" dirty="0">
-                          <a:solidFill>
-                            <a:srgbClr val="FFFFFF"/>
-                          </a:solidFill>
-                          <a:latin typeface="Calibri" pitchFamily="34" charset="0"/>
-                          <a:ea typeface="Calibri" pitchFamily="34" charset="-122"/>
-                          <a:cs typeface="Calibri" pitchFamily="34" charset="-120"/>
-                        </a:rPr>
-                        <a:t>Definition</a:t>
-                      </a:r>
-                      <a:endParaRPr lang="en-US" sz="1200" dirty="0">
-                        <a:latin typeface="Calibri" charset="0"/>
-                        <a:ea typeface="Calibri" charset="0"/>
-                        <a:cs typeface="Calibri" charset="0"/>
-                      </a:endParaRPr>
-                    </a:p>
-                  </a:txBody>
-                  <a:tcPr marL="91440" marR="91440" marT="45720" marB="45720">
-                    <a:lnL w="6350" cap="flat" cmpd="sng" algn="ctr">
-                      <a:solidFill>
-                        <a:srgbClr val="E5E2DC"/>
-                      </a:solidFill>
-                      <a:prstDash val="solid"/>
-                      <a:round/>
-                      <a:headEnd type="none" w="med" len="med"/>
-                      <a:tailEnd type="none" w="med" len="med"/>
-                    </a:lnL>
-                    <a:lnR w="6350" cap="flat" cmpd="sng" algn="ctr">
-                      <a:solidFill>
-                        <a:srgbClr val="E5E2DC"/>
-                      </a:solidFill>
-                      <a:prstDash val="solid"/>
-                      <a:round/>
-                      <a:headEnd type="none" w="med" len="med"/>
-                      <a:tailEnd type="none" w="med" len="med"/>
-                    </a:lnR>
-                    <a:lnT w="6350" cap="flat" cmpd="sng" algn="ctr">
-                      <a:solidFill>
-                        <a:srgbClr val="E5E2DC"/>
-                      </a:solidFill>
-                      <a:prstDash val="solid"/>
-                      <a:round/>
-                      <a:headEnd type="none" w="med" len="med"/>
-                      <a:tailEnd type="none" w="med" len="med"/>
-                    </a:lnT>
-                    <a:lnB w="6350" cap="flat" cmpd="sng" algn="ctr">
-                      <a:solidFill>
-                        <a:srgbClr val="E5E2DC"/>
-                      </a:solidFill>
-                      <a:prstDash val="solid"/>
-                      <a:round/>
-                      <a:headEnd type="none" w="med" len="med"/>
-                      <a:tailEnd type="none" w="med" len="med"/>
-                    </a:lnB>
-                    <a:solidFill>
-                      <a:srgbClr val="1B2A4A"/>
-                    </a:solidFill>
-                  </a:tcPr>
-                </a:tc>
-                <a:tc>
-                  <a:txBody>
-                    <a:bodyPr/>
-                    <a:lstStyle/>
-                    <a:p>
-                      <a:pPr indent="0" marL="0">
-                        <a:buNone/>
-                      </a:pPr>
-                      <a:r>
-                        <a:rPr lang="en-US" sz="1200" b="1" dirty="0">
-                          <a:solidFill>
-                            <a:srgbClr val="FFFFFF"/>
-                          </a:solidFill>
-                          <a:latin typeface="Calibri" pitchFamily="34" charset="0"/>
-                          <a:ea typeface="Calibri" pitchFamily="34" charset="-122"/>
-                          <a:cs typeface="Calibri" pitchFamily="34" charset="-120"/>
-                        </a:rPr>
-                        <a:t>Example</a:t>
-                      </a:r>
-                      <a:endParaRPr lang="en-US" sz="1200" dirty="0">
-                        <a:latin typeface="Calibri" charset="0"/>
-                        <a:ea typeface="Calibri" charset="0"/>
-                        <a:cs typeface="Calibri" charset="0"/>
-                      </a:endParaRPr>
-                    </a:p>
-                  </a:txBody>
-                  <a:tcPr marL="91440" marR="91440" marT="45720" marB="45720">
-                    <a:lnL w="6350" cap="flat" cmpd="sng" algn="ctr">
-                      <a:solidFill>
-                        <a:srgbClr val="E5E2DC"/>
-                      </a:solidFill>
-                      <a:prstDash val="solid"/>
-                      <a:round/>
-                      <a:headEnd type="none" w="med" len="med"/>
-                      <a:tailEnd type="none" w="med" len="med"/>
-                    </a:lnL>
-                    <a:lnR w="6350" cap="flat" cmpd="sng" algn="ctr">
-                      <a:solidFill>
-                        <a:srgbClr val="E5E2DC"/>
-                      </a:solidFill>
-                      <a:prstDash val="solid"/>
-                      <a:round/>
-                      <a:headEnd type="none" w="med" len="med"/>
-                      <a:tailEnd type="none" w="med" len="med"/>
-                    </a:lnR>
-                    <a:lnT w="6350" cap="flat" cmpd="sng" algn="ctr">
-                      <a:solidFill>
-                        <a:srgbClr val="E5E2DC"/>
-                      </a:solidFill>
-                      <a:prstDash val="solid"/>
-                      <a:round/>
-                      <a:headEnd type="none" w="med" len="med"/>
-                      <a:tailEnd type="none" w="med" len="med"/>
-                    </a:lnT>
-                    <a:lnB w="6350" cap="flat" cmpd="sng" algn="ctr">
-                      <a:solidFill>
-                        <a:srgbClr val="E5E2DC"/>
-                      </a:solidFill>
-                      <a:prstDash val="solid"/>
-                      <a:round/>
-                      <a:headEnd type="none" w="med" len="med"/>
-                      <a:tailEnd type="none" w="med" len="med"/>
-                    </a:lnB>
-                    <a:solidFill>
-                      <a:srgbClr val="1B2A4A"/>
-                    </a:solidFill>
-                  </a:tcPr>
-                </a:tc>
-              </a:tr>
-              <a:tr h="502920">
-                <a:tc>
-                  <a:txBody>
-                    <a:bodyPr/>
-                    <a:lstStyle/>
-                    <a:p>
-                      <a:pPr indent="0" marL="0">
-                        <a:buNone/>
-                      </a:pPr>
-                      <a:r>
-                        <a:rPr lang="en-US" sz="1200" dirty="0">
-                          <a:solidFill>
-                            <a:srgbClr val="3D3A36"/>
-                          </a:solidFill>
-                          <a:latin typeface="Calibri" pitchFamily="34" charset="0"/>
-                          <a:ea typeface="Calibri" pitchFamily="34" charset="-122"/>
-                          <a:cs typeface="Calibri" pitchFamily="34" charset="-120"/>
-                        </a:rPr>
-                        <a:t>Mutualism</a:t>
-                      </a:r>
-                      <a:endParaRPr lang="en-US" sz="1200" dirty="0">
-                        <a:latin typeface="Calibri" charset="0"/>
-                        <a:ea typeface="Calibri" charset="0"/>
-                        <a:cs typeface="Calibri" charset="0"/>
-                      </a:endParaRPr>
-                    </a:p>
-                  </a:txBody>
-                  <a:tcPr marL="91440" marR="91440" marT="45720" marB="45720">
-                    <a:lnL w="6350" cap="flat" cmpd="sng" algn="ctr">
-                      <a:solidFill>
-                        <a:srgbClr val="E5E2DC"/>
-                      </a:solidFill>
-                      <a:prstDash val="solid"/>
-                      <a:round/>
-                      <a:headEnd type="none" w="med" len="med"/>
-                      <a:tailEnd type="none" w="med" len="med"/>
-                    </a:lnL>
-                    <a:lnR w="6350" cap="flat" cmpd="sng" algn="ctr">
-                      <a:solidFill>
-                        <a:srgbClr val="E5E2DC"/>
-                      </a:solidFill>
-                      <a:prstDash val="solid"/>
-                      <a:round/>
-                      <a:headEnd type="none" w="med" len="med"/>
-                      <a:tailEnd type="none" w="med" len="med"/>
-                    </a:lnR>
-                    <a:lnT w="6350" cap="flat" cmpd="sng" algn="ctr">
-                      <a:solidFill>
-                        <a:srgbClr val="E5E2DC"/>
-                      </a:solidFill>
-                      <a:prstDash val="solid"/>
-                      <a:round/>
-                      <a:headEnd type="none" w="med" len="med"/>
-                      <a:tailEnd type="none" w="med" len="med"/>
-                    </a:lnT>
-                    <a:lnB w="6350" cap="flat" cmpd="sng" algn="ctr">
-                      <a:solidFill>
-                        <a:srgbClr val="E5E2DC"/>
-                      </a:solidFill>
-                      <a:prstDash val="solid"/>
-                      <a:round/>
-                      <a:headEnd type="none" w="med" len="med"/>
-                      <a:tailEnd type="none" w="med" len="med"/>
-                    </a:lnB>
-                  </a:tcPr>
-                </a:tc>
-                <a:tc>
-                  <a:txBody>
-                    <a:bodyPr/>
-                    <a:lstStyle/>
-                    <a:p>
-                      <a:pPr indent="0" marL="0">
-                        <a:buNone/>
-                      </a:pPr>
-                      <a:r>
-                        <a:rPr lang="en-US" sz="1200" dirty="0">
-                          <a:solidFill>
-                            <a:srgbClr val="3D3A36"/>
-                          </a:solidFill>
-                          <a:latin typeface="Calibri" pitchFamily="34" charset="0"/>
-                          <a:ea typeface="Calibri" pitchFamily="34" charset="-122"/>
-                          <a:cs typeface="Calibri" pitchFamily="34" charset="-120"/>
-                        </a:rPr>
-                        <a:t>Both benefit</a:t>
-                      </a:r>
-                      <a:endParaRPr lang="en-US" sz="1200" dirty="0">
-                        <a:latin typeface="Calibri" charset="0"/>
-                        <a:ea typeface="Calibri" charset="0"/>
-                        <a:cs typeface="Calibri" charset="0"/>
-                      </a:endParaRPr>
-                    </a:p>
-                  </a:txBody>
-                  <a:tcPr marL="91440" marR="91440" marT="45720" marB="45720">
-                    <a:lnL w="6350" cap="flat" cmpd="sng" algn="ctr">
-                      <a:solidFill>
-                        <a:srgbClr val="E5E2DC"/>
-                      </a:solidFill>
-                      <a:prstDash val="solid"/>
-                      <a:round/>
-                      <a:headEnd type="none" w="med" len="med"/>
-                      <a:tailEnd type="none" w="med" len="med"/>
-                    </a:lnL>
-                    <a:lnR w="6350" cap="flat" cmpd="sng" algn="ctr">
-                      <a:solidFill>
-                        <a:srgbClr val="E5E2DC"/>
-                      </a:solidFill>
-                      <a:prstDash val="solid"/>
-                      <a:round/>
-                      <a:headEnd type="none" w="med" len="med"/>
-                      <a:tailEnd type="none" w="med" len="med"/>
-                    </a:lnR>
-                    <a:lnT w="6350" cap="flat" cmpd="sng" algn="ctr">
-                      <a:solidFill>
-                        <a:srgbClr val="E5E2DC"/>
-                      </a:solidFill>
-                      <a:prstDash val="solid"/>
-                      <a:round/>
-                      <a:headEnd type="none" w="med" len="med"/>
-                      <a:tailEnd type="none" w="med" len="med"/>
-                    </a:lnT>
-                    <a:lnB w="6350" cap="flat" cmpd="sng" algn="ctr">
-                      <a:solidFill>
-                        <a:srgbClr val="E5E2DC"/>
-                      </a:solidFill>
-                      <a:prstDash val="solid"/>
-                      <a:round/>
-                      <a:headEnd type="none" w="med" len="med"/>
-                      <a:tailEnd type="none" w="med" len="med"/>
-                    </a:lnB>
-                  </a:tcPr>
-                </a:tc>
-                <a:tc>
-                  <a:txBody>
-                    <a:bodyPr/>
-                    <a:lstStyle/>
-                    <a:p>
-                      <a:pPr indent="0" marL="0">
-                        <a:buNone/>
-                      </a:pPr>
-                      <a:r>
-                        <a:rPr lang="en-US" sz="1200" dirty="0">
-                          <a:solidFill>
-                            <a:srgbClr val="3D3A36"/>
-                          </a:solidFill>
-                          <a:latin typeface="Calibri" pitchFamily="34" charset="0"/>
-                          <a:ea typeface="Calibri" pitchFamily="34" charset="-122"/>
-                          <a:cs typeface="Calibri" pitchFamily="34" charset="-120"/>
-                        </a:rPr>
-                        <a:t>Bee pollinates flower; gets nectar</a:t>
-                      </a:r>
-                      <a:endParaRPr lang="en-US" sz="1200" dirty="0">
-                        <a:latin typeface="Calibri" charset="0"/>
-                        <a:ea typeface="Calibri" charset="0"/>
-                        <a:cs typeface="Calibri" charset="0"/>
-                      </a:endParaRPr>
-                    </a:p>
-                  </a:txBody>
-                  <a:tcPr marL="91440" marR="91440" marT="45720" marB="45720">
-                    <a:lnL w="6350" cap="flat" cmpd="sng" algn="ctr">
-                      <a:solidFill>
-                        <a:srgbClr val="E5E2DC"/>
-                      </a:solidFill>
-                      <a:prstDash val="solid"/>
-                      <a:round/>
-                      <a:headEnd type="none" w="med" len="med"/>
-                      <a:tailEnd type="none" w="med" len="med"/>
-                    </a:lnL>
-                    <a:lnR w="6350" cap="flat" cmpd="sng" algn="ctr">
-                      <a:solidFill>
-                        <a:srgbClr val="E5E2DC"/>
-                      </a:solidFill>
-                      <a:prstDash val="solid"/>
-                      <a:round/>
-                      <a:headEnd type="none" w="med" len="med"/>
-                      <a:tailEnd type="none" w="med" len="med"/>
-                    </a:lnR>
-                    <a:lnT w="6350" cap="flat" cmpd="sng" algn="ctr">
-                      <a:solidFill>
-                        <a:srgbClr val="E5E2DC"/>
-                      </a:solidFill>
-                      <a:prstDash val="solid"/>
-                      <a:round/>
-                      <a:headEnd type="none" w="med" len="med"/>
-                      <a:tailEnd type="none" w="med" len="med"/>
-                    </a:lnT>
-                    <a:lnB w="6350" cap="flat" cmpd="sng" algn="ctr">
-                      <a:solidFill>
-                        <a:srgbClr val="E5E2DC"/>
-                      </a:solidFill>
-                      <a:prstDash val="solid"/>
-                      <a:round/>
-                      <a:headEnd type="none" w="med" len="med"/>
-                      <a:tailEnd type="none" w="med" len="med"/>
-                    </a:lnB>
-                  </a:tcPr>
-                </a:tc>
-              </a:tr>
-              <a:tr h="502920">
-                <a:tc>
-                  <a:txBody>
-                    <a:bodyPr/>
-                    <a:lstStyle/>
-                    <a:p>
-                      <a:pPr indent="0" marL="0">
-                        <a:buNone/>
-                      </a:pPr>
-                      <a:r>
-                        <a:rPr lang="en-US" sz="1200" dirty="0">
-                          <a:solidFill>
-                            <a:srgbClr val="3D3A36"/>
-                          </a:solidFill>
-                          <a:latin typeface="Calibri" pitchFamily="34" charset="0"/>
-                          <a:ea typeface="Calibri" pitchFamily="34" charset="-122"/>
-                          <a:cs typeface="Calibri" pitchFamily="34" charset="-120"/>
-                        </a:rPr>
-                        <a:t>Commensalism</a:t>
-                      </a:r>
-                      <a:endParaRPr lang="en-US" sz="1200" dirty="0">
-                        <a:latin typeface="Calibri" charset="0"/>
-                        <a:ea typeface="Calibri" charset="0"/>
-                        <a:cs typeface="Calibri" charset="0"/>
-                      </a:endParaRPr>
-                    </a:p>
-                  </a:txBody>
-                  <a:tcPr marL="91440" marR="91440" marT="45720" marB="45720">
-                    <a:lnL w="6350" cap="flat" cmpd="sng" algn="ctr">
-                      <a:solidFill>
-                        <a:srgbClr val="E5E2DC"/>
-                      </a:solidFill>
-                      <a:prstDash val="solid"/>
-                      <a:round/>
-                      <a:headEnd type="none" w="med" len="med"/>
-                      <a:tailEnd type="none" w="med" len="med"/>
-                    </a:lnL>
-                    <a:lnR w="6350" cap="flat" cmpd="sng" algn="ctr">
-                      <a:solidFill>
-                        <a:srgbClr val="E5E2DC"/>
-                      </a:solidFill>
-                      <a:prstDash val="solid"/>
-                      <a:round/>
-                      <a:headEnd type="none" w="med" len="med"/>
-                      <a:tailEnd type="none" w="med" len="med"/>
-                    </a:lnR>
-                    <a:lnT w="6350" cap="flat" cmpd="sng" algn="ctr">
-                      <a:solidFill>
-                        <a:srgbClr val="E5E2DC"/>
-                      </a:solidFill>
-                      <a:prstDash val="solid"/>
-                      <a:round/>
-                      <a:headEnd type="none" w="med" len="med"/>
-                      <a:tailEnd type="none" w="med" len="med"/>
-                    </a:lnT>
-                    <a:lnB w="6350" cap="flat" cmpd="sng" algn="ctr">
-                      <a:solidFill>
-                        <a:srgbClr val="E5E2DC"/>
-                      </a:solidFill>
-                      <a:prstDash val="solid"/>
-                      <a:round/>
-                      <a:headEnd type="none" w="med" len="med"/>
-                      <a:tailEnd type="none" w="med" len="med"/>
-                    </a:lnB>
-                  </a:tcPr>
-                </a:tc>
-                <a:tc>
-                  <a:txBody>
-                    <a:bodyPr/>
-                    <a:lstStyle/>
-                    <a:p>
-                      <a:pPr indent="0" marL="0">
-                        <a:buNone/>
-                      </a:pPr>
-                      <a:r>
-                        <a:rPr lang="en-US" sz="1200" dirty="0">
-                          <a:solidFill>
-                            <a:srgbClr val="3D3A36"/>
-                          </a:solidFill>
-                          <a:latin typeface="Calibri" pitchFamily="34" charset="0"/>
-                          <a:ea typeface="Calibri" pitchFamily="34" charset="-122"/>
-                          <a:cs typeface="Calibri" pitchFamily="34" charset="-120"/>
-                        </a:rPr>
-                        <a:t>One benefits, other unaffected</a:t>
-                      </a:r>
-                      <a:endParaRPr lang="en-US" sz="1200" dirty="0">
-                        <a:latin typeface="Calibri" charset="0"/>
-                        <a:ea typeface="Calibri" charset="0"/>
-                        <a:cs typeface="Calibri" charset="0"/>
-                      </a:endParaRPr>
-                    </a:p>
-                  </a:txBody>
-                  <a:tcPr marL="91440" marR="91440" marT="45720" marB="45720">
-                    <a:lnL w="6350" cap="flat" cmpd="sng" algn="ctr">
-                      <a:solidFill>
-                        <a:srgbClr val="E5E2DC"/>
-                      </a:solidFill>
-                      <a:prstDash val="solid"/>
-                      <a:round/>
-                      <a:headEnd type="none" w="med" len="med"/>
-                      <a:tailEnd type="none" w="med" len="med"/>
-                    </a:lnL>
-                    <a:lnR w="6350" cap="flat" cmpd="sng" algn="ctr">
-                      <a:solidFill>
-                        <a:srgbClr val="E5E2DC"/>
-                      </a:solidFill>
-                      <a:prstDash val="solid"/>
-                      <a:round/>
-                      <a:headEnd type="none" w="med" len="med"/>
-                      <a:tailEnd type="none" w="med" len="med"/>
-                    </a:lnR>
-                    <a:lnT w="6350" cap="flat" cmpd="sng" algn="ctr">
-                      <a:solidFill>
-                        <a:srgbClr val="E5E2DC"/>
-                      </a:solidFill>
-                      <a:prstDash val="solid"/>
-                      <a:round/>
-                      <a:headEnd type="none" w="med" len="med"/>
-                      <a:tailEnd type="none" w="med" len="med"/>
-                    </a:lnT>
-                    <a:lnB w="6350" cap="flat" cmpd="sng" algn="ctr">
-                      <a:solidFill>
-                        <a:srgbClr val="E5E2DC"/>
-                      </a:solidFill>
-                      <a:prstDash val="solid"/>
-                      <a:round/>
-                      <a:headEnd type="none" w="med" len="med"/>
-                      <a:tailEnd type="none" w="med" len="med"/>
-                    </a:lnB>
-                  </a:tcPr>
-                </a:tc>
-                <a:tc>
-                  <a:txBody>
-                    <a:bodyPr/>
-                    <a:lstStyle/>
-                    <a:p>
-                      <a:pPr indent="0" marL="0">
-                        <a:buNone/>
-                      </a:pPr>
-                      <a:r>
-                        <a:rPr lang="en-US" sz="1200" dirty="0">
-                          <a:solidFill>
-                            <a:srgbClr val="3D3A36"/>
-                          </a:solidFill>
-                          <a:latin typeface="Calibri" pitchFamily="34" charset="0"/>
-                          <a:ea typeface="Calibri" pitchFamily="34" charset="-122"/>
-                          <a:cs typeface="Calibri" pitchFamily="34" charset="-120"/>
-                        </a:rPr>
-                        <a:t>Barnacles on a whale</a:t>
-                      </a:r>
-                      <a:endParaRPr lang="en-US" sz="1200" dirty="0">
-                        <a:latin typeface="Calibri" charset="0"/>
-                        <a:ea typeface="Calibri" charset="0"/>
-                        <a:cs typeface="Calibri" charset="0"/>
-                      </a:endParaRPr>
-                    </a:p>
-                  </a:txBody>
-                  <a:tcPr marL="91440" marR="91440" marT="45720" marB="45720">
-                    <a:lnL w="6350" cap="flat" cmpd="sng" algn="ctr">
-                      <a:solidFill>
-                        <a:srgbClr val="E5E2DC"/>
-                      </a:solidFill>
-                      <a:prstDash val="solid"/>
-                      <a:round/>
-                      <a:headEnd type="none" w="med" len="med"/>
-                      <a:tailEnd type="none" w="med" len="med"/>
-                    </a:lnL>
-                    <a:lnR w="6350" cap="flat" cmpd="sng" algn="ctr">
-                      <a:solidFill>
-                        <a:srgbClr val="E5E2DC"/>
-                      </a:solidFill>
-                      <a:prstDash val="solid"/>
-                      <a:round/>
-                      <a:headEnd type="none" w="med" len="med"/>
-                      <a:tailEnd type="none" w="med" len="med"/>
-                    </a:lnR>
-                    <a:lnT w="6350" cap="flat" cmpd="sng" algn="ctr">
-                      <a:solidFill>
-                        <a:srgbClr val="E5E2DC"/>
-                      </a:solidFill>
-                      <a:prstDash val="solid"/>
-                      <a:round/>
-                      <a:headEnd type="none" w="med" len="med"/>
-                      <a:tailEnd type="none" w="med" len="med"/>
-                    </a:lnT>
-                    <a:lnB w="6350" cap="flat" cmpd="sng" algn="ctr">
-                      <a:solidFill>
-                        <a:srgbClr val="E5E2DC"/>
-                      </a:solidFill>
-                      <a:prstDash val="solid"/>
-                      <a:round/>
-                      <a:headEnd type="none" w="med" len="med"/>
-                      <a:tailEnd type="none" w="med" len="med"/>
-                    </a:lnB>
-                  </a:tcPr>
-                </a:tc>
-              </a:tr>
-              <a:tr h="502920">
-                <a:tc>
-                  <a:txBody>
-                    <a:bodyPr/>
-                    <a:lstStyle/>
-                    <a:p>
-                      <a:pPr indent="0" marL="0">
-                        <a:buNone/>
-                      </a:pPr>
-                      <a:r>
-                        <a:rPr lang="en-US" sz="1200" dirty="0">
-                          <a:solidFill>
-                            <a:srgbClr val="3D3A36"/>
-                          </a:solidFill>
-                          <a:latin typeface="Calibri" pitchFamily="34" charset="0"/>
-                          <a:ea typeface="Calibri" pitchFamily="34" charset="-122"/>
-                          <a:cs typeface="Calibri" pitchFamily="34" charset="-120"/>
-                        </a:rPr>
-                        <a:t>Parasitism</a:t>
-                      </a:r>
-                      <a:endParaRPr lang="en-US" sz="1200" dirty="0">
-                        <a:latin typeface="Calibri" charset="0"/>
-                        <a:ea typeface="Calibri" charset="0"/>
-                        <a:cs typeface="Calibri" charset="0"/>
-                      </a:endParaRPr>
-                    </a:p>
-                  </a:txBody>
-                  <a:tcPr marL="91440" marR="91440" marT="45720" marB="45720">
-                    <a:lnL w="6350" cap="flat" cmpd="sng" algn="ctr">
-                      <a:solidFill>
-                        <a:srgbClr val="E5E2DC"/>
-                      </a:solidFill>
-                      <a:prstDash val="solid"/>
-                      <a:round/>
-                      <a:headEnd type="none" w="med" len="med"/>
-                      <a:tailEnd type="none" w="med" len="med"/>
-                    </a:lnL>
-                    <a:lnR w="6350" cap="flat" cmpd="sng" algn="ctr">
-                      <a:solidFill>
-                        <a:srgbClr val="E5E2DC"/>
-                      </a:solidFill>
-                      <a:prstDash val="solid"/>
-                      <a:round/>
-                      <a:headEnd type="none" w="med" len="med"/>
-                      <a:tailEnd type="none" w="med" len="med"/>
-                    </a:lnR>
-                    <a:lnT w="6350" cap="flat" cmpd="sng" algn="ctr">
-                      <a:solidFill>
-                        <a:srgbClr val="E5E2DC"/>
-                      </a:solidFill>
-                      <a:prstDash val="solid"/>
-                      <a:round/>
-                      <a:headEnd type="none" w="med" len="med"/>
-                      <a:tailEnd type="none" w="med" len="med"/>
-                    </a:lnT>
-                    <a:lnB w="6350" cap="flat" cmpd="sng" algn="ctr">
-                      <a:solidFill>
-                        <a:srgbClr val="E5E2DC"/>
-                      </a:solidFill>
-                      <a:prstDash val="solid"/>
-                      <a:round/>
-                      <a:headEnd type="none" w="med" len="med"/>
-                      <a:tailEnd type="none" w="med" len="med"/>
-                    </a:lnB>
-                  </a:tcPr>
-                </a:tc>
-                <a:tc>
-                  <a:txBody>
-                    <a:bodyPr/>
-                    <a:lstStyle/>
-                    <a:p>
-                      <a:pPr indent="0" marL="0">
-                        <a:buNone/>
-                      </a:pPr>
-                      <a:r>
-                        <a:rPr lang="en-US" sz="1200" dirty="0">
-                          <a:solidFill>
-                            <a:srgbClr val="3D3A36"/>
-                          </a:solidFill>
-                          <a:latin typeface="Calibri" pitchFamily="34" charset="0"/>
-                          <a:ea typeface="Calibri" pitchFamily="34" charset="-122"/>
-                          <a:cs typeface="Calibri" pitchFamily="34" charset="-120"/>
-                        </a:rPr>
-                        <a:t>One benefits at other's expense</a:t>
-                      </a:r>
-                      <a:endParaRPr lang="en-US" sz="1200" dirty="0">
-                        <a:latin typeface="Calibri" charset="0"/>
-                        <a:ea typeface="Calibri" charset="0"/>
-                        <a:cs typeface="Calibri" charset="0"/>
-                      </a:endParaRPr>
-                    </a:p>
-                  </a:txBody>
-                  <a:tcPr marL="91440" marR="91440" marT="45720" marB="45720">
-                    <a:lnL w="6350" cap="flat" cmpd="sng" algn="ctr">
-                      <a:solidFill>
-                        <a:srgbClr val="E5E2DC"/>
-                      </a:solidFill>
-                      <a:prstDash val="solid"/>
-                      <a:round/>
-                      <a:headEnd type="none" w="med" len="med"/>
-                      <a:tailEnd type="none" w="med" len="med"/>
-                    </a:lnL>
-                    <a:lnR w="6350" cap="flat" cmpd="sng" algn="ctr">
-                      <a:solidFill>
-                        <a:srgbClr val="E5E2DC"/>
-                      </a:solidFill>
-                      <a:prstDash val="solid"/>
-                      <a:round/>
-                      <a:headEnd type="none" w="med" len="med"/>
-                      <a:tailEnd type="none" w="med" len="med"/>
-                    </a:lnR>
-                    <a:lnT w="6350" cap="flat" cmpd="sng" algn="ctr">
-                      <a:solidFill>
-                        <a:srgbClr val="E5E2DC"/>
-                      </a:solidFill>
-                      <a:prstDash val="solid"/>
-                      <a:round/>
-                      <a:headEnd type="none" w="med" len="med"/>
-                      <a:tailEnd type="none" w="med" len="med"/>
-                    </a:lnT>
-                    <a:lnB w="6350" cap="flat" cmpd="sng" algn="ctr">
-                      <a:solidFill>
-                        <a:srgbClr val="E5E2DC"/>
-                      </a:solidFill>
-                      <a:prstDash val="solid"/>
-                      <a:round/>
-                      <a:headEnd type="none" w="med" len="med"/>
-                      <a:tailEnd type="none" w="med" len="med"/>
-                    </a:lnB>
-                  </a:tcPr>
-                </a:tc>
-                <a:tc>
-                  <a:txBody>
-                    <a:bodyPr/>
-                    <a:lstStyle/>
-                    <a:p>
-                      <a:pPr indent="0" marL="0">
-                        <a:buNone/>
-                      </a:pPr>
-                      <a:r>
-                        <a:rPr lang="en-US" sz="1200" dirty="0">
-                          <a:solidFill>
-                            <a:srgbClr val="3D3A36"/>
-                          </a:solidFill>
-                          <a:latin typeface="Calibri" pitchFamily="34" charset="0"/>
-                          <a:ea typeface="Calibri" pitchFamily="34" charset="-122"/>
-                          <a:cs typeface="Calibri" pitchFamily="34" charset="-120"/>
-                        </a:rPr>
-                        <a:t>Tapeworm in a host</a:t>
-                      </a:r>
-                      <a:endParaRPr lang="en-US" sz="1200" dirty="0">
-                        <a:latin typeface="Calibri" charset="0"/>
-                        <a:ea typeface="Calibri" charset="0"/>
-                        <a:cs typeface="Calibri" charset="0"/>
-                      </a:endParaRPr>
-                    </a:p>
-                  </a:txBody>
-                  <a:tcPr marL="91440" marR="91440" marT="45720" marB="45720">
-                    <a:lnL w="6350" cap="flat" cmpd="sng" algn="ctr">
-                      <a:solidFill>
-                        <a:srgbClr val="E5E2DC"/>
-                      </a:solidFill>
-                      <a:prstDash val="solid"/>
-                      <a:round/>
-                      <a:headEnd type="none" w="med" len="med"/>
-                      <a:tailEnd type="none" w="med" len="med"/>
-                    </a:lnL>
-                    <a:lnR w="6350" cap="flat" cmpd="sng" algn="ctr">
-                      <a:solidFill>
-                        <a:srgbClr val="E5E2DC"/>
-                      </a:solidFill>
-                      <a:prstDash val="solid"/>
-                      <a:round/>
-                      <a:headEnd type="none" w="med" len="med"/>
-                      <a:tailEnd type="none" w="med" len="med"/>
-                    </a:lnR>
-                    <a:lnT w="6350" cap="flat" cmpd="sng" algn="ctr">
-                      <a:solidFill>
-                        <a:srgbClr val="E5E2DC"/>
-                      </a:solidFill>
-                      <a:prstDash val="solid"/>
-                      <a:round/>
-                      <a:headEnd type="none" w="med" len="med"/>
-                      <a:tailEnd type="none" w="med" len="med"/>
-                    </a:lnT>
-                    <a:lnB w="6350" cap="flat" cmpd="sng" algn="ctr">
-                      <a:solidFill>
-                        <a:srgbClr val="E5E2DC"/>
-                      </a:solidFill>
-                      <a:prstDash val="solid"/>
-                      <a:round/>
-                      <a:headEnd type="none" w="med" len="med"/>
-                      <a:tailEnd type="none" w="med" len="med"/>
-                    </a:lnB>
-                  </a:tcPr>
-                </a:tc>
-              </a:tr>
-            </a:tbl>
-          </a:graphicData>
-        </a:graphic>
-      </p:graphicFrame>
+              <a:t>What Is Interdependence?</a:t>
+            </a:r>
+            <a:endParaRPr lang="en-US" sz="2200" dirty="0"/>
+          </a:p>
+        </p:txBody>
+      </p:sp>
+      <p:sp>
+        <p:nvSpPr>
+          <p:cNvPr id="5" name="Text 3"/>
+          <p:cNvSpPr/>
+          <p:nvPr/>
+        </p:nvSpPr>
+        <p:spPr>
+          <a:xfrm>
+            <a:off x="640080" y="1005840"/>
+            <a:ext cx="7863840" cy="2926080"/>
+          </a:xfrm>
+          <a:prstGeom prst="rect">
+            <a:avLst/>
+          </a:prstGeom>
+          <a:noFill/>
+          <a:ln/>
+        </p:spPr>
+        <p:txBody>
+          <a:bodyPr wrap="square" rtlCol="0" anchor="ctr"/>
+          <a:lstStyle/>
+          <a:p>
+            <a:pPr marL="342900" indent="-342900">
+              <a:spcAft>
+                <a:spcPts val="800"/>
+              </a:spcAft>
+              <a:buSzPct val="100000"/>
+              <a:buChar char="•"/>
+            </a:pPr>
+            <a:r>
+              <a:rPr lang="en-US" sz="1600" dirty="0">
+                <a:solidFill>
+                  <a:srgbClr val="3D3A36"/>
+                </a:solidFill>
+                <a:latin typeface="Calibri" pitchFamily="34" charset="0"/>
+                <a:ea typeface="Calibri" pitchFamily="34" charset="-122"/>
+                <a:cs typeface="Calibri" pitchFamily="34" charset="-120"/>
+              </a:rPr>
+              <a:t>Organisms depend on each other to survive.</a:t>
+            </a:r>
+            <a:endParaRPr lang="en-US" sz="1600" dirty="0"/>
+          </a:p>
+          <a:p>
+            <a:pPr marL="342900" indent="-342900">
+              <a:spcAft>
+                <a:spcPts val="800"/>
+              </a:spcAft>
+              <a:buSzPct val="100000"/>
+              <a:buChar char="•"/>
+            </a:pPr>
+            <a:r>
+              <a:rPr lang="en-US" sz="1600" dirty="0">
+                <a:solidFill>
+                  <a:srgbClr val="3D3A36"/>
+                </a:solidFill>
+                <a:latin typeface="Calibri" pitchFamily="34" charset="0"/>
+                <a:ea typeface="Calibri" pitchFamily="34" charset="-122"/>
+                <a:cs typeface="Calibri" pitchFamily="34" charset="-120"/>
+              </a:rPr>
+              <a:t>If one species is affected, it impacts the whole ecosystem.</a:t>
+            </a:r>
+            <a:endParaRPr lang="en-US" sz="1600" dirty="0"/>
+          </a:p>
+          <a:p>
+            <a:pPr marL="342900" indent="-342900">
+              <a:spcAft>
+                <a:spcPts val="800"/>
+              </a:spcAft>
+              <a:buSzPct val="100000"/>
+              <a:buChar char="•"/>
+            </a:pPr>
+            <a:r>
+              <a:rPr lang="en-US" sz="1600" dirty="0">
+                <a:solidFill>
+                  <a:srgbClr val="3D3A36"/>
+                </a:solidFill>
+                <a:latin typeface="Calibri" pitchFamily="34" charset="0"/>
+                <a:ea typeface="Calibri" pitchFamily="34" charset="-122"/>
+                <a:cs typeface="Calibri" pitchFamily="34" charset="-120"/>
+              </a:rPr>
+              <a:t>Creates a delicate balance.</a:t>
+            </a:r>
+            <a:endParaRPr lang="en-US" sz="1600" dirty="0"/>
+          </a:p>
+          <a:p>
+            <a:pPr marL="342900" indent="-342900">
+              <a:spcAft>
+                <a:spcPts val="800"/>
+              </a:spcAft>
+              <a:buSzPct val="100000"/>
+              <a:buChar char="•"/>
+            </a:pPr>
+            <a:r>
+              <a:rPr lang="en-US" sz="1600" dirty="0">
+                <a:solidFill>
+                  <a:srgbClr val="3D3A36"/>
+                </a:solidFill>
+                <a:latin typeface="Calibri" pitchFamily="34" charset="0"/>
+                <a:ea typeface="Calibri" pitchFamily="34" charset="-122"/>
+                <a:cs typeface="Calibri" pitchFamily="34" charset="-120"/>
+              </a:rPr>
+              <a:t>Disrupting one link causes a cascade effect.</a:t>
+            </a:r>
+            <a:endParaRPr lang="en-US" sz="1600" dirty="0"/>
+          </a:p>
+        </p:txBody>
+      </p:sp>
+      <p:sp>
+        <p:nvSpPr>
+          <p:cNvPr id="6" name="Shape 4"/>
+          <p:cNvSpPr/>
+          <p:nvPr/>
+        </p:nvSpPr>
+        <p:spPr>
+          <a:xfrm>
+            <a:off x="640080" y="4114800"/>
+            <a:ext cx="7863840" cy="731520"/>
+          </a:xfrm>
+          <a:prstGeom prst="rect">
+            <a:avLst/>
+          </a:prstGeom>
+          <a:solidFill>
+            <a:srgbClr val="E8F5F3"/>
+          </a:solidFill>
+          <a:ln/>
+          <a:effectLst>
+            <a:outerShdw sx="100000" sy="100000" kx="0" ky="0" algn="bl" rotWithShape="0" blurRad="76200" dist="25400" dir="8100000">
+              <a:srgbClr val="000000">
+                <a:alpha val="12000"/>
+              </a:srgbClr>
+            </a:outerShdw>
+          </a:effectLst>
+        </p:spPr>
+      </p:sp>
+      <p:sp>
+        <p:nvSpPr>
+          <p:cNvPr id="7" name="Shape 5"/>
+          <p:cNvSpPr/>
+          <p:nvPr/>
+        </p:nvSpPr>
+        <p:spPr>
+          <a:xfrm>
+            <a:off x="640080" y="4114800"/>
+            <a:ext cx="64008" cy="731520"/>
+          </a:xfrm>
+          <a:prstGeom prst="rect">
+            <a:avLst/>
+          </a:prstGeom>
+          <a:solidFill>
+            <a:srgbClr val="E9C46A"/>
+          </a:solidFill>
+          <a:ln/>
+        </p:spPr>
+      </p:sp>
+      <p:sp>
+        <p:nvSpPr>
+          <p:cNvPr id="8" name="Text 6"/>
+          <p:cNvSpPr/>
+          <p:nvPr/>
+        </p:nvSpPr>
+        <p:spPr>
+          <a:xfrm>
+            <a:off x="914400" y="4160520"/>
+            <a:ext cx="7406640" cy="640080"/>
+          </a:xfrm>
+          <a:prstGeom prst="rect">
+            <a:avLst/>
+          </a:prstGeom>
+          <a:noFill/>
+          <a:ln/>
+        </p:spPr>
+        <p:txBody>
+          <a:bodyPr wrap="square" rtlCol="0" anchor="ctr"/>
+          <a:lstStyle/>
+          <a:p>
+            <a:pPr indent="0" marL="0">
+              <a:buNone/>
+            </a:pPr>
+            <a:r>
+              <a:rPr lang="en-US" sz="1300" i="1" dirty="0">
+                <a:solidFill>
+                  <a:srgbClr val="3D3A36"/>
+                </a:solidFill>
+                <a:latin typeface="Calibri" pitchFamily="34" charset="0"/>
+                <a:ea typeface="Calibri" pitchFamily="34" charset="-122"/>
+                <a:cs typeface="Calibri" pitchFamily="34" charset="-120"/>
+              </a:rPr>
+              <a:t>Think of it like a tower of blocks — remove one and others may fall.</a:t>
+            </a:r>
+            <a:endParaRPr lang="en-US" sz="1300" dirty="0"/>
+          </a:p>
+        </p:txBody>
+      </p:sp>
     </p:spTree>
   </p:cSld>
   <p:clrMapOvr>
@@ -2484,6 +2348,13 @@
 <file path=ppt/slides/slide4.xml><?xml version="1.0" encoding="utf-8"?>
 <p:sld xmlns:a="http://schemas.openxmlformats.org/drawingml/2006/main" xmlns:r="http://schemas.openxmlformats.org/officeDocument/2006/relationships" xmlns:p="http://schemas.openxmlformats.org/presentationml/2006/main">
   <p:cSld name="Slide 4">
+    <p:bg>
+      <p:bgPr>
+        <a:solidFill>
+          <a:srgbClr val="FAF8F5"/>
+        </a:solidFill>
+      </p:bgPr>
+    </p:bg>
     <p:spTree>
       <p:nvGrpSpPr>
         <p:cNvPr id="1" name=""/>
@@ -2507,13 +2378,13 @@
         <p:spPr>
           <a:xfrm>
             <a:off x="0" y="0"/>
-            <a:ext cx="9144000" cy="5143500"/>
-          </a:xfrm>
-          <a:prstGeom prst="rect">
-            <a:avLst/>
-          </a:prstGeom>
-          <a:solidFill>
-            <a:srgbClr val="1B2A4A"/>
+            <a:ext cx="9144000" cy="822960"/>
+          </a:xfrm>
+          <a:prstGeom prst="rect">
+            <a:avLst/>
+          </a:prstGeom>
+          <a:solidFill>
+            <a:srgbClr val="FFFFFF"/>
           </a:solidFill>
           <a:ln/>
         </p:spPr>
@@ -2526,14 +2397,14 @@
         </p:nvSpPr>
         <p:spPr>
           <a:xfrm>
-            <a:off x="0" y="4777740"/>
-            <a:ext cx="9144000" cy="365760"/>
-          </a:xfrm>
-          <a:prstGeom prst="rect">
-            <a:avLst/>
-          </a:prstGeom>
-          <a:solidFill>
-            <a:srgbClr val="1B2A4A"/>
+            <a:off x="0" y="795528"/>
+            <a:ext cx="9144000" cy="27432"/>
+          </a:xfrm>
+          <a:prstGeom prst="rect">
+            <a:avLst/>
+          </a:prstGeom>
+          <a:solidFill>
+            <a:srgbClr val="E9C46A"/>
           </a:solidFill>
           <a:ln/>
         </p:spPr>
@@ -2546,8 +2417,8 @@
         </p:nvSpPr>
         <p:spPr>
           <a:xfrm>
-            <a:off x="731520" y="1371600"/>
-            <a:ext cx="7680960" cy="914400"/>
+            <a:off x="640080" y="91440"/>
+            <a:ext cx="7863840" cy="640080"/>
           </a:xfrm>
           <a:prstGeom prst="rect">
             <a:avLst/>
@@ -2556,37 +2427,84 @@
           <a:ln/>
         </p:spPr>
         <p:txBody>
-          <a:bodyPr wrap="square" rtlCol="0" anchor="ctr"/>
-          <a:lstStyle/>
-          <a:p>
-            <a:pPr algn="ctr" indent="0" marL="0">
+          <a:bodyPr wrap="square" lIns="0" tIns="0" rIns="0" bIns="0" rtlCol="0" anchor="ctr"/>
+          <a:lstStyle/>
+          <a:p>
+            <a:pPr indent="0" marL="0">
               <a:buNone/>
             </a:pPr>
             <a:r>
-              <a:rPr lang="en-US" sz="3600" b="1" dirty="0">
-                <a:solidFill>
-                  <a:srgbClr val="FFFFFF"/>
+              <a:rPr lang="en-US" sz="2200" b="1" dirty="0">
+                <a:solidFill>
+                  <a:srgbClr val="1B2A4A"/>
                 </a:solidFill>
                 <a:latin typeface="Georgia" pitchFamily="34" charset="0"/>
                 <a:ea typeface="Georgia" pitchFamily="34" charset="-122"/>
                 <a:cs typeface="Georgia" pitchFamily="34" charset="-120"/>
               </a:rPr>
-              <a:t>Review &amp; Practise</a:t>
-            </a:r>
-            <a:endParaRPr lang="en-US" sz="3600" dirty="0"/>
-          </a:p>
-        </p:txBody>
-      </p:sp>
-      <p:sp>
-        <p:nvSpPr>
-          <p:cNvPr id="5" name="Text 3"/>
-          <p:cNvSpPr/>
-          <p:nvPr/>
-        </p:nvSpPr>
-        <p:spPr>
-          <a:xfrm>
-            <a:off x="731520" y="2468880"/>
-            <a:ext cx="7680960" cy="548640"/>
+              <a:t>Types of Relationships</a:t>
+            </a:r>
+            <a:endParaRPr lang="en-US" sz="2200" dirty="0"/>
+          </a:p>
+        </p:txBody>
+      </p:sp>
+      <p:sp>
+        <p:nvSpPr>
+          <p:cNvPr id="5" name="Shape 3"/>
+          <p:cNvSpPr/>
+          <p:nvPr/>
+        </p:nvSpPr>
+        <p:spPr>
+          <a:xfrm>
+            <a:off x="457200" y="1005840"/>
+            <a:ext cx="3931920" cy="3657600"/>
+          </a:xfrm>
+          <a:prstGeom prst="rect">
+            <a:avLst/>
+          </a:prstGeom>
+          <a:solidFill>
+            <a:srgbClr val="FFFFFF"/>
+          </a:solidFill>
+          <a:ln/>
+          <a:effectLst>
+            <a:outerShdw sx="100000" sy="100000" kx="0" ky="0" algn="bl" rotWithShape="0" blurRad="76200" dist="25400" dir="8100000">
+              <a:srgbClr val="000000">
+                <a:alpha val="12000"/>
+              </a:srgbClr>
+            </a:outerShdw>
+          </a:effectLst>
+        </p:spPr>
+      </p:sp>
+      <p:sp>
+        <p:nvSpPr>
+          <p:cNvPr id="6" name="Shape 4"/>
+          <p:cNvSpPr/>
+          <p:nvPr/>
+        </p:nvSpPr>
+        <p:spPr>
+          <a:xfrm>
+            <a:off x="457200" y="1005840"/>
+            <a:ext cx="3931920" cy="64008"/>
+          </a:xfrm>
+          <a:prstGeom prst="rect">
+            <a:avLst/>
+          </a:prstGeom>
+          <a:solidFill>
+            <a:srgbClr val="E9C46A"/>
+          </a:solidFill>
+          <a:ln/>
+        </p:spPr>
+      </p:sp>
+      <p:sp>
+        <p:nvSpPr>
+          <p:cNvPr id="7" name="Text 5"/>
+          <p:cNvSpPr/>
+          <p:nvPr/>
+        </p:nvSpPr>
+        <p:spPr>
+          <a:xfrm>
+            <a:off x="640080" y="1188720"/>
+            <a:ext cx="3566160" cy="457200"/>
           </a:xfrm>
           <a:prstGeom prst="rect">
             <a:avLst/>
@@ -2598,34 +2516,34 @@
           <a:bodyPr wrap="square" rtlCol="0" anchor="ctr"/>
           <a:lstStyle/>
           <a:p>
-            <a:pPr algn="ctr" indent="0" marL="0">
+            <a:pPr indent="0" marL="0">
               <a:buNone/>
             </a:pPr>
             <a:r>
-              <a:rPr lang="en-US" sz="1800" dirty="0">
-                <a:solidFill>
-                  <a:srgbClr val="1B2A4A"/>
+              <a:rPr lang="en-US" sz="1600" b="1" dirty="0">
+                <a:solidFill>
+                  <a:srgbClr val="E9C46A"/>
                 </a:solidFill>
                 <a:latin typeface="Calibri" pitchFamily="34" charset="0"/>
                 <a:ea typeface="Calibri" pitchFamily="34" charset="-122"/>
                 <a:cs typeface="Calibri" pitchFamily="34" charset="-120"/>
               </a:rPr>
-              <a:t>learnlattice.org/students/exam-revision</a:t>
-            </a:r>
-            <a:endParaRPr lang="en-US" sz="1800" dirty="0"/>
-          </a:p>
-        </p:txBody>
-      </p:sp>
-      <p:sp>
-        <p:nvSpPr>
-          <p:cNvPr id="6" name="Text 4"/>
-          <p:cNvSpPr/>
-          <p:nvPr/>
-        </p:nvSpPr>
-        <p:spPr>
-          <a:xfrm>
-            <a:off x="731520" y="3200400"/>
-            <a:ext cx="7680960" cy="457200"/>
+              <a:t>Mutualism (both benefit)</a:t>
+            </a:r>
+            <a:endParaRPr lang="en-US" sz="1600" dirty="0"/>
+          </a:p>
+        </p:txBody>
+      </p:sp>
+      <p:sp>
+        <p:nvSpPr>
+          <p:cNvPr id="8" name="Text 6"/>
+          <p:cNvSpPr/>
+          <p:nvPr/>
+        </p:nvSpPr>
+        <p:spPr>
+          <a:xfrm>
+            <a:off x="640080" y="1691640"/>
+            <a:ext cx="3566160" cy="2743200"/>
           </a:xfrm>
           <a:prstGeom prst="rect">
             <a:avLst/>
@@ -2637,21 +2555,1564 @@
           <a:bodyPr wrap="square" rtlCol="0" anchor="ctr"/>
           <a:lstStyle/>
           <a:p>
-            <a:pPr algn="ctr" indent="0" marL="0">
-              <a:buNone/>
+            <a:pPr marL="342900" indent="-342900">
+              <a:spcAft>
+                <a:spcPts val="600"/>
+              </a:spcAft>
+              <a:buSzPct val="100000"/>
+              <a:buChar char="•"/>
             </a:pPr>
             <a:r>
               <a:rPr lang="en-US" sz="1400" dirty="0">
                 <a:solidFill>
-                  <a:srgbClr val="9B9690"/>
+                  <a:srgbClr val="3D3A36"/>
                 </a:solidFill>
                 <a:latin typeface="Calibri" pitchFamily="34" charset="0"/>
                 <a:ea typeface="Calibri" pitchFamily="34" charset="-122"/>
                 <a:cs typeface="Calibri" pitchFamily="34" charset="-120"/>
               </a:rPr>
+              <a:t>Bees and flowers.</a:t>
+            </a:r>
+            <a:endParaRPr lang="en-US" sz="1400" dirty="0"/>
+          </a:p>
+          <a:p>
+            <a:pPr marL="342900" indent="-342900">
+              <a:spcAft>
+                <a:spcPts val="600"/>
+              </a:spcAft>
+              <a:buSzPct val="100000"/>
+              <a:buChar char="•"/>
+            </a:pPr>
+            <a:r>
+              <a:rPr lang="en-US" sz="1400" dirty="0">
+                <a:solidFill>
+                  <a:srgbClr val="3D3A36"/>
+                </a:solidFill>
+                <a:latin typeface="Calibri" pitchFamily="34" charset="0"/>
+                <a:ea typeface="Calibri" pitchFamily="34" charset="-122"/>
+                <a:cs typeface="Calibri" pitchFamily="34" charset="-120"/>
+              </a:rPr>
+              <a:t>Clownfish and anemones.</a:t>
+            </a:r>
+            <a:endParaRPr lang="en-US" sz="1400" dirty="0"/>
+          </a:p>
+          <a:p>
+            <a:pPr marL="342900" indent="-342900">
+              <a:spcAft>
+                <a:spcPts val="600"/>
+              </a:spcAft>
+              <a:buSzPct val="100000"/>
+              <a:buChar char="•"/>
+            </a:pPr>
+            <a:r>
+              <a:rPr lang="en-US" sz="1400" dirty="0">
+                <a:solidFill>
+                  <a:srgbClr val="3D3A36"/>
+                </a:solidFill>
+                <a:latin typeface="Calibri" pitchFamily="34" charset="0"/>
+                <a:ea typeface="Calibri" pitchFamily="34" charset="-122"/>
+                <a:cs typeface="Calibri" pitchFamily="34" charset="-120"/>
+              </a:rPr>
+              <a:t>Korean pine and nutcrackers — birds spread seeds.</a:t>
+            </a:r>
+            <a:endParaRPr lang="en-US" sz="1400" dirty="0"/>
+          </a:p>
+        </p:txBody>
+      </p:sp>
+      <p:sp>
+        <p:nvSpPr>
+          <p:cNvPr id="9" name="Shape 7"/>
+          <p:cNvSpPr/>
+          <p:nvPr/>
+        </p:nvSpPr>
+        <p:spPr>
+          <a:xfrm>
+            <a:off x="4754880" y="1005840"/>
+            <a:ext cx="3931920" cy="3657600"/>
+          </a:xfrm>
+          <a:prstGeom prst="rect">
+            <a:avLst/>
+          </a:prstGeom>
+          <a:solidFill>
+            <a:srgbClr val="FFFFFF"/>
+          </a:solidFill>
+          <a:ln/>
+          <a:effectLst>
+            <a:outerShdw sx="100000" sy="100000" kx="0" ky="0" algn="bl" rotWithShape="0" blurRad="76200" dist="25400" dir="8100000">
+              <a:srgbClr val="000000">
+                <a:alpha val="12000"/>
+              </a:srgbClr>
+            </a:outerShdw>
+          </a:effectLst>
+        </p:spPr>
+      </p:sp>
+      <p:sp>
+        <p:nvSpPr>
+          <p:cNvPr id="10" name="Shape 8"/>
+          <p:cNvSpPr/>
+          <p:nvPr/>
+        </p:nvSpPr>
+        <p:spPr>
+          <a:xfrm>
+            <a:off x="4754880" y="1005840"/>
+            <a:ext cx="3931920" cy="64008"/>
+          </a:xfrm>
+          <a:prstGeom prst="rect">
+            <a:avLst/>
+          </a:prstGeom>
+          <a:solidFill>
+            <a:srgbClr val="E9C46A"/>
+          </a:solidFill>
+          <a:ln/>
+        </p:spPr>
+      </p:sp>
+      <p:sp>
+        <p:nvSpPr>
+          <p:cNvPr id="11" name="Text 9"/>
+          <p:cNvSpPr/>
+          <p:nvPr/>
+        </p:nvSpPr>
+        <p:spPr>
+          <a:xfrm>
+            <a:off x="4937760" y="1188720"/>
+            <a:ext cx="3566160" cy="457200"/>
+          </a:xfrm>
+          <a:prstGeom prst="rect">
+            <a:avLst/>
+          </a:prstGeom>
+          <a:noFill/>
+          <a:ln/>
+        </p:spPr>
+        <p:txBody>
+          <a:bodyPr wrap="square" rtlCol="0" anchor="ctr"/>
+          <a:lstStyle/>
+          <a:p>
+            <a:pPr indent="0" marL="0">
+              <a:buNone/>
+            </a:pPr>
+            <a:r>
+              <a:rPr lang="en-US" sz="1600" b="1" dirty="0">
+                <a:solidFill>
+                  <a:srgbClr val="E9C46A"/>
+                </a:solidFill>
+                <a:latin typeface="Calibri" pitchFamily="34" charset="0"/>
+                <a:ea typeface="Calibri" pitchFamily="34" charset="-122"/>
+                <a:cs typeface="Calibri" pitchFamily="34" charset="-120"/>
+              </a:rPr>
+              <a:t>Parasitism (one harmed)</a:t>
+            </a:r>
+            <a:endParaRPr lang="en-US" sz="1600" dirty="0"/>
+          </a:p>
+        </p:txBody>
+      </p:sp>
+      <p:sp>
+        <p:nvSpPr>
+          <p:cNvPr id="12" name="Text 10"/>
+          <p:cNvSpPr/>
+          <p:nvPr/>
+        </p:nvSpPr>
+        <p:spPr>
+          <a:xfrm>
+            <a:off x="4937760" y="1691640"/>
+            <a:ext cx="3566160" cy="2743200"/>
+          </a:xfrm>
+          <a:prstGeom prst="rect">
+            <a:avLst/>
+          </a:prstGeom>
+          <a:noFill/>
+          <a:ln/>
+        </p:spPr>
+        <p:txBody>
+          <a:bodyPr wrap="square" rtlCol="0" anchor="ctr"/>
+          <a:lstStyle/>
+          <a:p>
+            <a:pPr marL="342900" indent="-342900">
+              <a:spcAft>
+                <a:spcPts val="600"/>
+              </a:spcAft>
+              <a:buSzPct val="100000"/>
+              <a:buChar char="•"/>
+            </a:pPr>
+            <a:r>
+              <a:rPr lang="en-US" sz="1400" dirty="0">
+                <a:solidFill>
+                  <a:srgbClr val="3D3A36"/>
+                </a:solidFill>
+                <a:latin typeface="Calibri" pitchFamily="34" charset="0"/>
+                <a:ea typeface="Calibri" pitchFamily="34" charset="-122"/>
+                <a:cs typeface="Calibri" pitchFamily="34" charset="-120"/>
+              </a:rPr>
+              <a:t>Ticks on deer.</a:t>
+            </a:r>
+            <a:endParaRPr lang="en-US" sz="1400" dirty="0"/>
+          </a:p>
+          <a:p>
+            <a:pPr marL="342900" indent="-342900">
+              <a:spcAft>
+                <a:spcPts val="600"/>
+              </a:spcAft>
+              <a:buSzPct val="100000"/>
+              <a:buChar char="•"/>
+            </a:pPr>
+            <a:r>
+              <a:rPr lang="en-US" sz="1400" dirty="0">
+                <a:solidFill>
+                  <a:srgbClr val="3D3A36"/>
+                </a:solidFill>
+                <a:latin typeface="Calibri" pitchFamily="34" charset="0"/>
+                <a:ea typeface="Calibri" pitchFamily="34" charset="-122"/>
+                <a:cs typeface="Calibri" pitchFamily="34" charset="-120"/>
+              </a:rPr>
+              <a:t>Mistletoe on trees.</a:t>
+            </a:r>
+            <a:endParaRPr lang="en-US" sz="1400" dirty="0"/>
+          </a:p>
+          <a:p>
+            <a:pPr marL="342900" indent="-342900">
+              <a:spcAft>
+                <a:spcPts val="600"/>
+              </a:spcAft>
+              <a:buSzPct val="100000"/>
+              <a:buChar char="•"/>
+            </a:pPr>
+            <a:r>
+              <a:rPr lang="en-US" sz="1400" dirty="0">
+                <a:solidFill>
+                  <a:srgbClr val="3D3A36"/>
+                </a:solidFill>
+                <a:latin typeface="Calibri" pitchFamily="34" charset="0"/>
+                <a:ea typeface="Calibri" pitchFamily="34" charset="-122"/>
+                <a:cs typeface="Calibri" pitchFamily="34" charset="-120"/>
+              </a:rPr>
+              <a:t>Liver flukes in fish — a concern in Chinese freshwater fish.</a:t>
+            </a:r>
+            <a:endParaRPr lang="en-US" sz="1400" dirty="0"/>
+          </a:p>
+        </p:txBody>
+      </p:sp>
+    </p:spTree>
+  </p:cSld>
+  <p:clrMapOvr>
+    <a:masterClrMapping/>
+  </p:clrMapOvr>
+</p:sld>
+</file>
+
+<file path=ppt/slides/slide5.xml><?xml version="1.0" encoding="utf-8"?>
+<p:sld xmlns:a="http://schemas.openxmlformats.org/drawingml/2006/main" xmlns:r="http://schemas.openxmlformats.org/officeDocument/2006/relationships" xmlns:p="http://schemas.openxmlformats.org/presentationml/2006/main">
+  <p:cSld name="Slide 5">
+    <p:bg>
+      <p:bgPr>
+        <a:solidFill>
+          <a:srgbClr val="FAF8F5"/>
+        </a:solidFill>
+      </p:bgPr>
+    </p:bg>
+    <p:spTree>
+      <p:nvGrpSpPr>
+        <p:cNvPr id="1" name=""/>
+        <p:cNvGrpSpPr/>
+        <p:nvPr/>
+      </p:nvGrpSpPr>
+      <p:grpSpPr>
+        <a:xfrm>
+          <a:off x="0" y="0"/>
+          <a:ext cx="0" cy="0"/>
+          <a:chOff x="0" y="0"/>
+          <a:chExt cx="0" cy="0"/>
+        </a:xfrm>
+      </p:grpSpPr>
+      <p:sp>
+        <p:nvSpPr>
+          <p:cNvPr id="2" name="Shape 0"/>
+          <p:cNvSpPr/>
+          <p:nvPr/>
+        </p:nvSpPr>
+        <p:spPr>
+          <a:xfrm>
+            <a:off x="0" y="0"/>
+            <a:ext cx="9144000" cy="822960"/>
+          </a:xfrm>
+          <a:prstGeom prst="rect">
+            <a:avLst/>
+          </a:prstGeom>
+          <a:solidFill>
+            <a:srgbClr val="FFFFFF"/>
+          </a:solidFill>
+          <a:ln/>
+        </p:spPr>
+      </p:sp>
+      <p:sp>
+        <p:nvSpPr>
+          <p:cNvPr id="3" name="Shape 1"/>
+          <p:cNvSpPr/>
+          <p:nvPr/>
+        </p:nvSpPr>
+        <p:spPr>
+          <a:xfrm>
+            <a:off x="0" y="795528"/>
+            <a:ext cx="9144000" cy="27432"/>
+          </a:xfrm>
+          <a:prstGeom prst="rect">
+            <a:avLst/>
+          </a:prstGeom>
+          <a:solidFill>
+            <a:srgbClr val="E9C46A"/>
+          </a:solidFill>
+          <a:ln/>
+        </p:spPr>
+      </p:sp>
+      <p:sp>
+        <p:nvSpPr>
+          <p:cNvPr id="4" name="Text 2"/>
+          <p:cNvSpPr/>
+          <p:nvPr/>
+        </p:nvSpPr>
+        <p:spPr>
+          <a:xfrm>
+            <a:off x="640080" y="91440"/>
+            <a:ext cx="7863840" cy="640080"/>
+          </a:xfrm>
+          <a:prstGeom prst="rect">
+            <a:avLst/>
+          </a:prstGeom>
+          <a:noFill/>
+          <a:ln/>
+        </p:spPr>
+        <p:txBody>
+          <a:bodyPr wrap="square" lIns="0" tIns="0" rIns="0" bIns="0" rtlCol="0" anchor="ctr"/>
+          <a:lstStyle/>
+          <a:p>
+            <a:pPr indent="0" marL="0">
+              <a:buNone/>
+            </a:pPr>
+            <a:r>
+              <a:rPr lang="en-US" sz="2200" b="1" dirty="0">
+                <a:solidFill>
+                  <a:srgbClr val="1B2A4A"/>
+                </a:solidFill>
+                <a:latin typeface="Georgia" pitchFamily="34" charset="0"/>
+                <a:ea typeface="Georgia" pitchFamily="34" charset="-122"/>
+                <a:cs typeface="Georgia" pitchFamily="34" charset="-120"/>
+              </a:rPr>
+              <a:t>Trophic Cascades</a:t>
+            </a:r>
+            <a:endParaRPr lang="en-US" sz="2200" dirty="0"/>
+          </a:p>
+        </p:txBody>
+      </p:sp>
+      <p:sp>
+        <p:nvSpPr>
+          <p:cNvPr id="5" name="Text 3"/>
+          <p:cNvSpPr/>
+          <p:nvPr/>
+        </p:nvSpPr>
+        <p:spPr>
+          <a:xfrm>
+            <a:off x="640080" y="1005840"/>
+            <a:ext cx="7863840" cy="2926080"/>
+          </a:xfrm>
+          <a:prstGeom prst="rect">
+            <a:avLst/>
+          </a:prstGeom>
+          <a:noFill/>
+          <a:ln/>
+        </p:spPr>
+        <p:txBody>
+          <a:bodyPr wrap="square" rtlCol="0" anchor="ctr"/>
+          <a:lstStyle/>
+          <a:p>
+            <a:pPr marL="342900" indent="-342900">
+              <a:spcAft>
+                <a:spcPts val="800"/>
+              </a:spcAft>
+              <a:buSzPct val="100000"/>
+              <a:buChar char="•"/>
+            </a:pPr>
+            <a:r>
+              <a:rPr lang="en-US" sz="1600" dirty="0">
+                <a:solidFill>
+                  <a:srgbClr val="3D3A36"/>
+                </a:solidFill>
+                <a:latin typeface="Calibri" pitchFamily="34" charset="0"/>
+                <a:ea typeface="Calibri" pitchFamily="34" charset="-122"/>
+                <a:cs typeface="Calibri" pitchFamily="34" charset="-120"/>
+              </a:rPr>
+              <a:t>Changes at one level ripple through the food web.</a:t>
+            </a:r>
+            <a:endParaRPr lang="en-US" sz="1600" dirty="0"/>
+          </a:p>
+          <a:p>
+            <a:pPr marL="342900" indent="-342900">
+              <a:spcAft>
+                <a:spcPts val="800"/>
+              </a:spcAft>
+              <a:buSzPct val="100000"/>
+              <a:buChar char="•"/>
+            </a:pPr>
+            <a:r>
+              <a:rPr lang="en-US" sz="1600" dirty="0">
+                <a:solidFill>
+                  <a:srgbClr val="3D3A36"/>
+                </a:solidFill>
+                <a:latin typeface="Calibri" pitchFamily="34" charset="0"/>
+                <a:ea typeface="Calibri" pitchFamily="34" charset="-122"/>
+                <a:cs typeface="Calibri" pitchFamily="34" charset="-120"/>
+              </a:rPr>
+              <a:t>Yellowstone: wolves removed → deer exploded → overgrazing → plant loss → soil erosion → rivers widened.</a:t>
+            </a:r>
+            <a:endParaRPr lang="en-US" sz="1600" dirty="0"/>
+          </a:p>
+          <a:p>
+            <a:pPr marL="342900" indent="-342900">
+              <a:spcAft>
+                <a:spcPts val="800"/>
+              </a:spcAft>
+              <a:buSzPct val="100000"/>
+              <a:buChar char="•"/>
+            </a:pPr>
+            <a:r>
+              <a:rPr lang="en-US" sz="1600" dirty="0">
+                <a:solidFill>
+                  <a:srgbClr val="3D3A36"/>
+                </a:solidFill>
+                <a:latin typeface="Calibri" pitchFamily="34" charset="0"/>
+                <a:ea typeface="Calibri" pitchFamily="34" charset="-122"/>
+                <a:cs typeface="Calibri" pitchFamily="34" charset="-120"/>
+              </a:rPr>
+              <a:t>Wolves reintroduced → deer reduced → trees recovered → rivers stabilised.</a:t>
+            </a:r>
+            <a:endParaRPr lang="en-US" sz="1600" dirty="0"/>
+          </a:p>
+          <a:p>
+            <a:pPr marL="342900" indent="-342900">
+              <a:spcAft>
+                <a:spcPts val="800"/>
+              </a:spcAft>
+              <a:buSzPct val="100000"/>
+              <a:buChar char="•"/>
+            </a:pPr>
+            <a:r>
+              <a:rPr lang="en-US" sz="1600" dirty="0">
+                <a:solidFill>
+                  <a:srgbClr val="3D3A36"/>
+                </a:solidFill>
+                <a:latin typeface="Calibri" pitchFamily="34" charset="0"/>
+                <a:ea typeface="Calibri" pitchFamily="34" charset="-122"/>
+                <a:cs typeface="Calibri" pitchFamily="34" charset="-120"/>
+              </a:rPr>
+              <a:t>Yangtze fishing ban (2021–2031): removing human fishing pressure to let the ecosystem recover.</a:t>
+            </a:r>
+            <a:endParaRPr lang="en-US" sz="1600" dirty="0"/>
+          </a:p>
+        </p:txBody>
+      </p:sp>
+      <p:sp>
+        <p:nvSpPr>
+          <p:cNvPr id="6" name="Shape 4"/>
+          <p:cNvSpPr/>
+          <p:nvPr/>
+        </p:nvSpPr>
+        <p:spPr>
+          <a:xfrm>
+            <a:off x="640080" y="4114800"/>
+            <a:ext cx="7863840" cy="731520"/>
+          </a:xfrm>
+          <a:prstGeom prst="rect">
+            <a:avLst/>
+          </a:prstGeom>
+          <a:solidFill>
+            <a:srgbClr val="E8F5F3"/>
+          </a:solidFill>
+          <a:ln/>
+          <a:effectLst>
+            <a:outerShdw sx="100000" sy="100000" kx="0" ky="0" algn="bl" rotWithShape="0" blurRad="76200" dist="25400" dir="8100000">
+              <a:srgbClr val="000000">
+                <a:alpha val="12000"/>
+              </a:srgbClr>
+            </a:outerShdw>
+          </a:effectLst>
+        </p:spPr>
+      </p:sp>
+      <p:sp>
+        <p:nvSpPr>
+          <p:cNvPr id="7" name="Shape 5"/>
+          <p:cNvSpPr/>
+          <p:nvPr/>
+        </p:nvSpPr>
+        <p:spPr>
+          <a:xfrm>
+            <a:off x="640080" y="4114800"/>
+            <a:ext cx="64008" cy="731520"/>
+          </a:xfrm>
+          <a:prstGeom prst="rect">
+            <a:avLst/>
+          </a:prstGeom>
+          <a:solidFill>
+            <a:srgbClr val="E9C46A"/>
+          </a:solidFill>
+          <a:ln/>
+        </p:spPr>
+      </p:sp>
+      <p:sp>
+        <p:nvSpPr>
+          <p:cNvPr id="8" name="Text 6"/>
+          <p:cNvSpPr/>
+          <p:nvPr/>
+        </p:nvSpPr>
+        <p:spPr>
+          <a:xfrm>
+            <a:off x="914400" y="4160520"/>
+            <a:ext cx="7406640" cy="640080"/>
+          </a:xfrm>
+          <a:prstGeom prst="rect">
+            <a:avLst/>
+          </a:prstGeom>
+          <a:noFill/>
+          <a:ln/>
+        </p:spPr>
+        <p:txBody>
+          <a:bodyPr wrap="square" rtlCol="0" anchor="ctr"/>
+          <a:lstStyle/>
+          <a:p>
+            <a:pPr indent="0" marL="0">
+              <a:buNone/>
+            </a:pPr>
+            <a:r>
+              <a:rPr lang="en-US" sz="1300" i="1" dirty="0">
+                <a:solidFill>
+                  <a:srgbClr val="3D3A36"/>
+                </a:solidFill>
+                <a:latin typeface="Calibri" pitchFamily="34" charset="0"/>
+                <a:ea typeface="Calibri" pitchFamily="34" charset="-122"/>
+                <a:cs typeface="Calibri" pitchFamily="34" charset="-120"/>
+              </a:rPr>
+              <a:t>The 10-year Yangtze fishing ban is the largest trophic cascade experiment in history.</a:t>
+            </a:r>
+            <a:endParaRPr lang="en-US" sz="1300" dirty="0"/>
+          </a:p>
+        </p:txBody>
+      </p:sp>
+    </p:spTree>
+  </p:cSld>
+  <p:clrMapOvr>
+    <a:masterClrMapping/>
+  </p:clrMapOvr>
+</p:sld>
+</file>
+
+<file path=ppt/slides/slide6.xml><?xml version="1.0" encoding="utf-8"?>
+<p:sld xmlns:a="http://schemas.openxmlformats.org/drawingml/2006/main" xmlns:r="http://schemas.openxmlformats.org/officeDocument/2006/relationships" xmlns:p="http://schemas.openxmlformats.org/presentationml/2006/main">
+  <p:cSld name="Slide 6">
+    <p:bg>
+      <p:bgPr>
+        <a:solidFill>
+          <a:srgbClr val="FAF8F5"/>
+        </a:solidFill>
+      </p:bgPr>
+    </p:bg>
+    <p:spTree>
+      <p:nvGrpSpPr>
+        <p:cNvPr id="1" name=""/>
+        <p:cNvGrpSpPr/>
+        <p:nvPr/>
+      </p:nvGrpSpPr>
+      <p:grpSpPr>
+        <a:xfrm>
+          <a:off x="0" y="0"/>
+          <a:ext cx="0" cy="0"/>
+          <a:chOff x="0" y="0"/>
+          <a:chExt cx="0" cy="0"/>
+        </a:xfrm>
+      </p:grpSpPr>
+      <p:sp>
+        <p:nvSpPr>
+          <p:cNvPr id="2" name="Shape 0"/>
+          <p:cNvSpPr/>
+          <p:nvPr/>
+        </p:nvSpPr>
+        <p:spPr>
+          <a:xfrm>
+            <a:off x="0" y="0"/>
+            <a:ext cx="9144000" cy="822960"/>
+          </a:xfrm>
+          <a:prstGeom prst="rect">
+            <a:avLst/>
+          </a:prstGeom>
+          <a:solidFill>
+            <a:srgbClr val="FFFFFF"/>
+          </a:solidFill>
+          <a:ln/>
+        </p:spPr>
+      </p:sp>
+      <p:sp>
+        <p:nvSpPr>
+          <p:cNvPr id="3" name="Shape 1"/>
+          <p:cNvSpPr/>
+          <p:nvPr/>
+        </p:nvSpPr>
+        <p:spPr>
+          <a:xfrm>
+            <a:off x="0" y="795528"/>
+            <a:ext cx="9144000" cy="27432"/>
+          </a:xfrm>
+          <a:prstGeom prst="rect">
+            <a:avLst/>
+          </a:prstGeom>
+          <a:solidFill>
+            <a:srgbClr val="E9C46A"/>
+          </a:solidFill>
+          <a:ln/>
+        </p:spPr>
+      </p:sp>
+      <p:sp>
+        <p:nvSpPr>
+          <p:cNvPr id="4" name="Text 2"/>
+          <p:cNvSpPr/>
+          <p:nvPr/>
+        </p:nvSpPr>
+        <p:spPr>
+          <a:xfrm>
+            <a:off x="640080" y="91440"/>
+            <a:ext cx="7863840" cy="640080"/>
+          </a:xfrm>
+          <a:prstGeom prst="rect">
+            <a:avLst/>
+          </a:prstGeom>
+          <a:noFill/>
+          <a:ln/>
+        </p:spPr>
+        <p:txBody>
+          <a:bodyPr wrap="square" lIns="0" tIns="0" rIns="0" bIns="0" rtlCol="0" anchor="ctr"/>
+          <a:lstStyle/>
+          <a:p>
+            <a:pPr indent="0" marL="0">
+              <a:buNone/>
+            </a:pPr>
+            <a:r>
+              <a:rPr lang="en-US" sz="2200" b="1" dirty="0">
+                <a:solidFill>
+                  <a:srgbClr val="1B2A4A"/>
+                </a:solidFill>
+                <a:latin typeface="Georgia" pitchFamily="34" charset="0"/>
+                <a:ea typeface="Georgia" pitchFamily="34" charset="-122"/>
+                <a:cs typeface="Georgia" pitchFamily="34" charset="-120"/>
+              </a:rPr>
+              <a:t>Competition</a:t>
+            </a:r>
+            <a:endParaRPr lang="en-US" sz="2200" dirty="0"/>
+          </a:p>
+        </p:txBody>
+      </p:sp>
+      <p:sp>
+        <p:nvSpPr>
+          <p:cNvPr id="5" name="Text 3"/>
+          <p:cNvSpPr/>
+          <p:nvPr/>
+        </p:nvSpPr>
+        <p:spPr>
+          <a:xfrm>
+            <a:off x="640080" y="1005840"/>
+            <a:ext cx="7863840" cy="2926080"/>
+          </a:xfrm>
+          <a:prstGeom prst="rect">
+            <a:avLst/>
+          </a:prstGeom>
+          <a:noFill/>
+          <a:ln/>
+        </p:spPr>
+        <p:txBody>
+          <a:bodyPr wrap="square" rtlCol="0" anchor="ctr"/>
+          <a:lstStyle/>
+          <a:p>
+            <a:pPr marL="342900" indent="-342900">
+              <a:spcAft>
+                <a:spcPts val="800"/>
+              </a:spcAft>
+              <a:buSzPct val="100000"/>
+              <a:buChar char="•"/>
+            </a:pPr>
+            <a:r>
+              <a:rPr lang="en-US" sz="1600" dirty="0">
+                <a:solidFill>
+                  <a:srgbClr val="3D3A36"/>
+                </a:solidFill>
+                <a:latin typeface="Calibri" pitchFamily="34" charset="0"/>
+                <a:ea typeface="Calibri" pitchFamily="34" charset="-122"/>
+                <a:cs typeface="Calibri" pitchFamily="34" charset="-120"/>
+              </a:rPr>
+              <a:t>Organisms compete for limited resources.</a:t>
+            </a:r>
+            <a:endParaRPr lang="en-US" sz="1600" dirty="0"/>
+          </a:p>
+          <a:p>
+            <a:pPr marL="342900" indent="-342900">
+              <a:spcAft>
+                <a:spcPts val="800"/>
+              </a:spcAft>
+              <a:buSzPct val="100000"/>
+              <a:buChar char="•"/>
+            </a:pPr>
+            <a:r>
+              <a:rPr lang="en-US" sz="1600" dirty="0">
+                <a:solidFill>
+                  <a:srgbClr val="3D3A36"/>
+                </a:solidFill>
+                <a:latin typeface="Calibri" pitchFamily="34" charset="0"/>
+                <a:ea typeface="Calibri" pitchFamily="34" charset="-122"/>
+                <a:cs typeface="Calibri" pitchFamily="34" charset="-120"/>
+              </a:rPr>
+              <a:t>Intraspecific: within same species (trees competing for light).</a:t>
+            </a:r>
+            <a:endParaRPr lang="en-US" sz="1600" dirty="0"/>
+          </a:p>
+          <a:p>
+            <a:pPr marL="342900" indent="-342900">
+              <a:spcAft>
+                <a:spcPts val="800"/>
+              </a:spcAft>
+              <a:buSzPct val="100000"/>
+              <a:buChar char="•"/>
+            </a:pPr>
+            <a:r>
+              <a:rPr lang="en-US" sz="1600" dirty="0">
+                <a:solidFill>
+                  <a:srgbClr val="3D3A36"/>
+                </a:solidFill>
+                <a:latin typeface="Calibri" pitchFamily="34" charset="0"/>
+                <a:ea typeface="Calibri" pitchFamily="34" charset="-122"/>
+                <a:cs typeface="Calibri" pitchFamily="34" charset="-120"/>
+              </a:rPr>
+              <a:t>Interspecific: between species.</a:t>
+            </a:r>
+            <a:endParaRPr lang="en-US" sz="1600" dirty="0"/>
+          </a:p>
+          <a:p>
+            <a:pPr marL="342900" indent="-342900">
+              <a:spcAft>
+                <a:spcPts val="800"/>
+              </a:spcAft>
+              <a:buSzPct val="100000"/>
+              <a:buChar char="•"/>
+            </a:pPr>
+            <a:r>
+              <a:rPr lang="en-US" sz="1600" dirty="0">
+                <a:solidFill>
+                  <a:srgbClr val="3D3A36"/>
+                </a:solidFill>
+                <a:latin typeface="Calibri" pitchFamily="34" charset="0"/>
+                <a:ea typeface="Calibri" pitchFamily="34" charset="-122"/>
+                <a:cs typeface="Calibri" pitchFamily="34" charset="-120"/>
+              </a:rPr>
+              <a:t>Resources: food, water, shelter, mates, light, space.</a:t>
+            </a:r>
+            <a:endParaRPr lang="en-US" sz="1600" dirty="0"/>
+          </a:p>
+          <a:p>
+            <a:pPr marL="342900" indent="-342900">
+              <a:spcAft>
+                <a:spcPts val="800"/>
+              </a:spcAft>
+              <a:buSzPct val="100000"/>
+              <a:buChar char="•"/>
+            </a:pPr>
+            <a:r>
+              <a:rPr lang="en-US" sz="1600" dirty="0">
+                <a:solidFill>
+                  <a:srgbClr val="3D3A36"/>
+                </a:solidFill>
+                <a:latin typeface="Calibri" pitchFamily="34" charset="0"/>
+                <a:ea typeface="Calibri" pitchFamily="34" charset="-122"/>
+                <a:cs typeface="Calibri" pitchFamily="34" charset="-120"/>
+              </a:rPr>
+              <a:t>Bamboo forests in China: pandas vs. other species for habitat.</a:t>
+            </a:r>
+            <a:endParaRPr lang="en-US" sz="1600" dirty="0"/>
+          </a:p>
+        </p:txBody>
+      </p:sp>
+    </p:spTree>
+  </p:cSld>
+  <p:clrMapOvr>
+    <a:masterClrMapping/>
+  </p:clrMapOvr>
+</p:sld>
+</file>
+
+<file path=ppt/slides/slide7.xml><?xml version="1.0" encoding="utf-8"?>
+<p:sld xmlns:a="http://schemas.openxmlformats.org/drawingml/2006/main" xmlns:r="http://schemas.openxmlformats.org/officeDocument/2006/relationships" xmlns:p="http://schemas.openxmlformats.org/presentationml/2006/main">
+  <p:cSld name="Slide 7">
+    <p:bg>
+      <p:bgPr>
+        <a:solidFill>
+          <a:srgbClr val="FAF8F5"/>
+        </a:solidFill>
+      </p:bgPr>
+    </p:bg>
+    <p:spTree>
+      <p:nvGrpSpPr>
+        <p:cNvPr id="1" name=""/>
+        <p:cNvGrpSpPr/>
+        <p:nvPr/>
+      </p:nvGrpSpPr>
+      <p:grpSpPr>
+        <a:xfrm>
+          <a:off x="0" y="0"/>
+          <a:ext cx="0" cy="0"/>
+          <a:chOff x="0" y="0"/>
+          <a:chExt cx="0" cy="0"/>
+        </a:xfrm>
+      </p:grpSpPr>
+      <p:sp>
+        <p:nvSpPr>
+          <p:cNvPr id="2" name="Shape 0"/>
+          <p:cNvSpPr/>
+          <p:nvPr/>
+        </p:nvSpPr>
+        <p:spPr>
+          <a:xfrm>
+            <a:off x="0" y="0"/>
+            <a:ext cx="9144000" cy="822960"/>
+          </a:xfrm>
+          <a:prstGeom prst="rect">
+            <a:avLst/>
+          </a:prstGeom>
+          <a:solidFill>
+            <a:srgbClr val="FFFFFF"/>
+          </a:solidFill>
+          <a:ln/>
+        </p:spPr>
+      </p:sp>
+      <p:sp>
+        <p:nvSpPr>
+          <p:cNvPr id="3" name="Shape 1"/>
+          <p:cNvSpPr/>
+          <p:nvPr/>
+        </p:nvSpPr>
+        <p:spPr>
+          <a:xfrm>
+            <a:off x="0" y="795528"/>
+            <a:ext cx="9144000" cy="27432"/>
+          </a:xfrm>
+          <a:prstGeom prst="rect">
+            <a:avLst/>
+          </a:prstGeom>
+          <a:solidFill>
+            <a:srgbClr val="E9C46A"/>
+          </a:solidFill>
+          <a:ln/>
+        </p:spPr>
+      </p:sp>
+      <p:sp>
+        <p:nvSpPr>
+          <p:cNvPr id="4" name="Text 2"/>
+          <p:cNvSpPr/>
+          <p:nvPr/>
+        </p:nvSpPr>
+        <p:spPr>
+          <a:xfrm>
+            <a:off x="640080" y="91440"/>
+            <a:ext cx="7863840" cy="640080"/>
+          </a:xfrm>
+          <a:prstGeom prst="rect">
+            <a:avLst/>
+          </a:prstGeom>
+          <a:noFill/>
+          <a:ln/>
+        </p:spPr>
+        <p:txBody>
+          <a:bodyPr wrap="square" lIns="0" tIns="0" rIns="0" bIns="0" rtlCol="0" anchor="ctr"/>
+          <a:lstStyle/>
+          <a:p>
+            <a:pPr indent="0" marL="0">
+              <a:buNone/>
+            </a:pPr>
+            <a:r>
+              <a:rPr lang="en-US" sz="2200" b="1" dirty="0">
+                <a:solidFill>
+                  <a:srgbClr val="1B2A4A"/>
+                </a:solidFill>
+                <a:latin typeface="Georgia" pitchFamily="34" charset="0"/>
+                <a:ea typeface="Georgia" pitchFamily="34" charset="-122"/>
+                <a:cs typeface="Georgia" pitchFamily="34" charset="-120"/>
+              </a:rPr>
+              <a:t>Recommended Videos</a:t>
+            </a:r>
+            <a:endParaRPr lang="en-US" sz="2200" dirty="0"/>
+          </a:p>
+        </p:txBody>
+      </p:sp>
+      <p:sp>
+        <p:nvSpPr>
+          <p:cNvPr id="5" name="Text 3"/>
+          <p:cNvSpPr/>
+          <p:nvPr/>
+        </p:nvSpPr>
+        <p:spPr>
+          <a:xfrm>
+            <a:off x="640080" y="868680"/>
+            <a:ext cx="7863840" cy="274320"/>
+          </a:xfrm>
+          <a:prstGeom prst="rect">
+            <a:avLst/>
+          </a:prstGeom>
+          <a:noFill/>
+          <a:ln/>
+        </p:spPr>
+        <p:txBody>
+          <a:bodyPr wrap="square" rtlCol="0" anchor="ctr"/>
+          <a:lstStyle/>
+          <a:p>
+            <a:pPr indent="0" marL="0">
+              <a:buNone/>
+            </a:pPr>
+            <a:r>
+              <a:rPr lang="en-US" sz="1200" i="1" dirty="0">
+                <a:solidFill>
+                  <a:srgbClr val="6B6660"/>
+                </a:solidFill>
+                <a:latin typeface="Calibri" pitchFamily="34" charset="0"/>
+                <a:ea typeface="Calibri" pitchFamily="34" charset="-122"/>
+                <a:cs typeface="Calibri" pitchFamily="34" charset="-120"/>
+              </a:rPr>
+              <a:t>Search these on YouTube to learn more.</a:t>
+            </a:r>
+            <a:endParaRPr lang="en-US" sz="1200" dirty="0"/>
+          </a:p>
+        </p:txBody>
+      </p:sp>
+      <p:sp>
+        <p:nvSpPr>
+          <p:cNvPr id="6" name="Shape 4"/>
+          <p:cNvSpPr/>
+          <p:nvPr/>
+        </p:nvSpPr>
+        <p:spPr>
+          <a:xfrm>
+            <a:off x="457200" y="1234440"/>
+            <a:ext cx="8229600" cy="1051560"/>
+          </a:xfrm>
+          <a:prstGeom prst="rect">
+            <a:avLst/>
+          </a:prstGeom>
+          <a:solidFill>
+            <a:srgbClr val="FFFFFF"/>
+          </a:solidFill>
+          <a:ln/>
+          <a:effectLst>
+            <a:outerShdw sx="100000" sy="100000" kx="0" ky="0" algn="bl" rotWithShape="0" blurRad="76200" dist="25400" dir="8100000">
+              <a:srgbClr val="000000">
+                <a:alpha val="12000"/>
+              </a:srgbClr>
+            </a:outerShdw>
+          </a:effectLst>
+        </p:spPr>
+      </p:sp>
+      <p:sp>
+        <p:nvSpPr>
+          <p:cNvPr id="7" name="Shape 5"/>
+          <p:cNvSpPr/>
+          <p:nvPr/>
+        </p:nvSpPr>
+        <p:spPr>
+          <a:xfrm>
+            <a:off x="457200" y="1234440"/>
+            <a:ext cx="64008" cy="1051560"/>
+          </a:xfrm>
+          <a:prstGeom prst="rect">
+            <a:avLst/>
+          </a:prstGeom>
+          <a:solidFill>
+            <a:srgbClr val="E9C46A"/>
+          </a:solidFill>
+          <a:ln/>
+        </p:spPr>
+      </p:sp>
+      <p:sp>
+        <p:nvSpPr>
+          <p:cNvPr id="8" name="Text 6"/>
+          <p:cNvSpPr/>
+          <p:nvPr/>
+        </p:nvSpPr>
+        <p:spPr>
+          <a:xfrm>
+            <a:off x="640080" y="1325880"/>
+            <a:ext cx="457200" cy="457200"/>
+          </a:xfrm>
+          <a:prstGeom prst="rect">
+            <a:avLst/>
+          </a:prstGeom>
+          <a:noFill/>
+          <a:ln/>
+        </p:spPr>
+        <p:txBody>
+          <a:bodyPr wrap="square" rtlCol="0" anchor="ctr"/>
+          <a:lstStyle/>
+          <a:p>
+            <a:pPr algn="ctr" indent="0" marL="0">
+              <a:buNone/>
+            </a:pPr>
+            <a:r>
+              <a:rPr lang="en-US" sz="2000" dirty="0">
+                <a:solidFill>
+                  <a:srgbClr val="E9C46A"/>
+                </a:solidFill>
+                <a:latin typeface="Calibri" pitchFamily="34" charset="0"/>
+                <a:ea typeface="Calibri" pitchFamily="34" charset="-122"/>
+                <a:cs typeface="Calibri" pitchFamily="34" charset="-120"/>
+              </a:rPr>
+              <a:t>▶</a:t>
+            </a:r>
+            <a:endParaRPr lang="en-US" sz="2000" dirty="0"/>
+          </a:p>
+        </p:txBody>
+      </p:sp>
+      <p:sp>
+        <p:nvSpPr>
+          <p:cNvPr id="9" name="Text 7"/>
+          <p:cNvSpPr/>
+          <p:nvPr/>
+        </p:nvSpPr>
+        <p:spPr>
+          <a:xfrm>
+            <a:off x="1188720" y="1307592"/>
+            <a:ext cx="7132320" cy="411480"/>
+          </a:xfrm>
+          <a:prstGeom prst="rect">
+            <a:avLst/>
+          </a:prstGeom>
+          <a:noFill/>
+          <a:ln/>
+        </p:spPr>
+        <p:txBody>
+          <a:bodyPr wrap="square" rtlCol="0" anchor="ctr"/>
+          <a:lstStyle/>
+          <a:p>
+            <a:pPr indent="0" marL="0">
+              <a:buNone/>
+            </a:pPr>
+            <a:r>
+              <a:rPr lang="en-US" sz="1400" b="1" dirty="0">
+                <a:solidFill>
+                  <a:srgbClr val="1B2A4A"/>
+                </a:solidFill>
+                <a:latin typeface="Calibri" pitchFamily="34" charset="0"/>
+                <a:ea typeface="Calibri" pitchFamily="34" charset="-122"/>
+                <a:cs typeface="Calibri" pitchFamily="34" charset="-120"/>
+              </a:rPr>
+              <a:t>How Wolves Change Rivers</a:t>
+            </a:r>
+            <a:endParaRPr lang="en-US" sz="1400" dirty="0"/>
+          </a:p>
+        </p:txBody>
+      </p:sp>
+      <p:sp>
+        <p:nvSpPr>
+          <p:cNvPr id="10" name="Text 8"/>
+          <p:cNvSpPr/>
+          <p:nvPr/>
+        </p:nvSpPr>
+        <p:spPr>
+          <a:xfrm>
+            <a:off x="1188720" y="1691640"/>
+            <a:ext cx="7132320" cy="320040"/>
+          </a:xfrm>
+          <a:prstGeom prst="rect">
+            <a:avLst/>
+          </a:prstGeom>
+          <a:noFill/>
+          <a:ln/>
+        </p:spPr>
+        <p:txBody>
+          <a:bodyPr wrap="square" rtlCol="0" anchor="ctr"/>
+          <a:lstStyle/>
+          <a:p>
+            <a:pPr indent="0" marL="0">
+              <a:buNone/>
+            </a:pPr>
+            <a:r>
+              <a:rPr lang="en-US" sz="1100" dirty="0">
+                <a:solidFill>
+                  <a:srgbClr val="6B6660"/>
+                </a:solidFill>
+                <a:latin typeface="Calibri" pitchFamily="34" charset="0"/>
+                <a:ea typeface="Calibri" pitchFamily="34" charset="-122"/>
+                <a:cs typeface="Calibri" pitchFamily="34" charset="-120"/>
+              </a:rPr>
+              <a:t>Sustainable Human  •  4 min</a:t>
+            </a:r>
+            <a:endParaRPr lang="en-US" sz="1100" dirty="0"/>
+          </a:p>
+        </p:txBody>
+      </p:sp>
+      <p:sp>
+        <p:nvSpPr>
+          <p:cNvPr id="11" name="Shape 9"/>
+          <p:cNvSpPr/>
+          <p:nvPr/>
+        </p:nvSpPr>
+        <p:spPr>
+          <a:xfrm>
+            <a:off x="457200" y="2423160"/>
+            <a:ext cx="8229600" cy="1051560"/>
+          </a:xfrm>
+          <a:prstGeom prst="rect">
+            <a:avLst/>
+          </a:prstGeom>
+          <a:solidFill>
+            <a:srgbClr val="FFFFFF"/>
+          </a:solidFill>
+          <a:ln/>
+          <a:effectLst>
+            <a:outerShdw sx="100000" sy="100000" kx="0" ky="0" algn="bl" rotWithShape="0" blurRad="76200" dist="25400" dir="8100000">
+              <a:srgbClr val="000000">
+                <a:alpha val="12000"/>
+              </a:srgbClr>
+            </a:outerShdw>
+          </a:effectLst>
+        </p:spPr>
+      </p:sp>
+      <p:sp>
+        <p:nvSpPr>
+          <p:cNvPr id="12" name="Shape 10"/>
+          <p:cNvSpPr/>
+          <p:nvPr/>
+        </p:nvSpPr>
+        <p:spPr>
+          <a:xfrm>
+            <a:off x="457200" y="2423160"/>
+            <a:ext cx="64008" cy="1051560"/>
+          </a:xfrm>
+          <a:prstGeom prst="rect">
+            <a:avLst/>
+          </a:prstGeom>
+          <a:solidFill>
+            <a:srgbClr val="E9C46A"/>
+          </a:solidFill>
+          <a:ln/>
+        </p:spPr>
+      </p:sp>
+      <p:sp>
+        <p:nvSpPr>
+          <p:cNvPr id="13" name="Text 11"/>
+          <p:cNvSpPr/>
+          <p:nvPr/>
+        </p:nvSpPr>
+        <p:spPr>
+          <a:xfrm>
+            <a:off x="640080" y="2514600"/>
+            <a:ext cx="457200" cy="457200"/>
+          </a:xfrm>
+          <a:prstGeom prst="rect">
+            <a:avLst/>
+          </a:prstGeom>
+          <a:noFill/>
+          <a:ln/>
+        </p:spPr>
+        <p:txBody>
+          <a:bodyPr wrap="square" rtlCol="0" anchor="ctr"/>
+          <a:lstStyle/>
+          <a:p>
+            <a:pPr algn="ctr" indent="0" marL="0">
+              <a:buNone/>
+            </a:pPr>
+            <a:r>
+              <a:rPr lang="en-US" sz="2000" dirty="0">
+                <a:solidFill>
+                  <a:srgbClr val="E9C46A"/>
+                </a:solidFill>
+                <a:latin typeface="Calibri" pitchFamily="34" charset="0"/>
+                <a:ea typeface="Calibri" pitchFamily="34" charset="-122"/>
+                <a:cs typeface="Calibri" pitchFamily="34" charset="-120"/>
+              </a:rPr>
+              <a:t>▶</a:t>
+            </a:r>
+            <a:endParaRPr lang="en-US" sz="2000" dirty="0"/>
+          </a:p>
+        </p:txBody>
+      </p:sp>
+      <p:sp>
+        <p:nvSpPr>
+          <p:cNvPr id="14" name="Text 12"/>
+          <p:cNvSpPr/>
+          <p:nvPr/>
+        </p:nvSpPr>
+        <p:spPr>
+          <a:xfrm>
+            <a:off x="1188720" y="2496312"/>
+            <a:ext cx="7132320" cy="411480"/>
+          </a:xfrm>
+          <a:prstGeom prst="rect">
+            <a:avLst/>
+          </a:prstGeom>
+          <a:noFill/>
+          <a:ln/>
+        </p:spPr>
+        <p:txBody>
+          <a:bodyPr wrap="square" rtlCol="0" anchor="ctr"/>
+          <a:lstStyle/>
+          <a:p>
+            <a:pPr indent="0" marL="0">
+              <a:buNone/>
+            </a:pPr>
+            <a:r>
+              <a:rPr lang="en-US" sz="1400" b="1" dirty="0">
+                <a:solidFill>
+                  <a:srgbClr val="1B2A4A"/>
+                </a:solidFill>
+                <a:latin typeface="Calibri" pitchFamily="34" charset="0"/>
+                <a:ea typeface="Calibri" pitchFamily="34" charset="-122"/>
+                <a:cs typeface="Calibri" pitchFamily="34" charset="-120"/>
+              </a:rPr>
+              <a:t>Symbiosis — Mutualism, Commensalism, Parasitism</a:t>
+            </a:r>
+            <a:endParaRPr lang="en-US" sz="1400" dirty="0"/>
+          </a:p>
+        </p:txBody>
+      </p:sp>
+      <p:sp>
+        <p:nvSpPr>
+          <p:cNvPr id="15" name="Text 13"/>
+          <p:cNvSpPr/>
+          <p:nvPr/>
+        </p:nvSpPr>
+        <p:spPr>
+          <a:xfrm>
+            <a:off x="1188720" y="2880360"/>
+            <a:ext cx="7132320" cy="320040"/>
+          </a:xfrm>
+          <a:prstGeom prst="rect">
+            <a:avLst/>
+          </a:prstGeom>
+          <a:noFill/>
+          <a:ln/>
+        </p:spPr>
+        <p:txBody>
+          <a:bodyPr wrap="square" rtlCol="0" anchor="ctr"/>
+          <a:lstStyle/>
+          <a:p>
+            <a:pPr indent="0" marL="0">
+              <a:buNone/>
+            </a:pPr>
+            <a:r>
+              <a:rPr lang="en-US" sz="1100" dirty="0">
+                <a:solidFill>
+                  <a:srgbClr val="6B6660"/>
+                </a:solidFill>
+                <a:latin typeface="Calibri" pitchFamily="34" charset="0"/>
+                <a:ea typeface="Calibri" pitchFamily="34" charset="-122"/>
+                <a:cs typeface="Calibri" pitchFamily="34" charset="-120"/>
+              </a:rPr>
+              <a:t>Amoeba Sisters  •  6 min</a:t>
+            </a:r>
+            <a:endParaRPr lang="en-US" sz="1100" dirty="0"/>
+          </a:p>
+        </p:txBody>
+      </p:sp>
+      <p:sp>
+        <p:nvSpPr>
+          <p:cNvPr id="16" name="Shape 14"/>
+          <p:cNvSpPr/>
+          <p:nvPr/>
+        </p:nvSpPr>
+        <p:spPr>
+          <a:xfrm>
+            <a:off x="457200" y="3611880"/>
+            <a:ext cx="8229600" cy="1051560"/>
+          </a:xfrm>
+          <a:prstGeom prst="rect">
+            <a:avLst/>
+          </a:prstGeom>
+          <a:solidFill>
+            <a:srgbClr val="FFFFFF"/>
+          </a:solidFill>
+          <a:ln/>
+          <a:effectLst>
+            <a:outerShdw sx="100000" sy="100000" kx="0" ky="0" algn="bl" rotWithShape="0" blurRad="76200" dist="25400" dir="8100000">
+              <a:srgbClr val="000000">
+                <a:alpha val="12000"/>
+              </a:srgbClr>
+            </a:outerShdw>
+          </a:effectLst>
+        </p:spPr>
+      </p:sp>
+      <p:sp>
+        <p:nvSpPr>
+          <p:cNvPr id="17" name="Shape 15"/>
+          <p:cNvSpPr/>
+          <p:nvPr/>
+        </p:nvSpPr>
+        <p:spPr>
+          <a:xfrm>
+            <a:off x="457200" y="3611880"/>
+            <a:ext cx="64008" cy="1051560"/>
+          </a:xfrm>
+          <a:prstGeom prst="rect">
+            <a:avLst/>
+          </a:prstGeom>
+          <a:solidFill>
+            <a:srgbClr val="E9C46A"/>
+          </a:solidFill>
+          <a:ln/>
+        </p:spPr>
+      </p:sp>
+      <p:sp>
+        <p:nvSpPr>
+          <p:cNvPr id="18" name="Text 16"/>
+          <p:cNvSpPr/>
+          <p:nvPr/>
+        </p:nvSpPr>
+        <p:spPr>
+          <a:xfrm>
+            <a:off x="640080" y="3703320"/>
+            <a:ext cx="457200" cy="457200"/>
+          </a:xfrm>
+          <a:prstGeom prst="rect">
+            <a:avLst/>
+          </a:prstGeom>
+          <a:noFill/>
+          <a:ln/>
+        </p:spPr>
+        <p:txBody>
+          <a:bodyPr wrap="square" rtlCol="0" anchor="ctr"/>
+          <a:lstStyle/>
+          <a:p>
+            <a:pPr algn="ctr" indent="0" marL="0">
+              <a:buNone/>
+            </a:pPr>
+            <a:r>
+              <a:rPr lang="en-US" sz="2000" dirty="0">
+                <a:solidFill>
+                  <a:srgbClr val="E9C46A"/>
+                </a:solidFill>
+                <a:latin typeface="Calibri" pitchFamily="34" charset="0"/>
+                <a:ea typeface="Calibri" pitchFamily="34" charset="-122"/>
+                <a:cs typeface="Calibri" pitchFamily="34" charset="-120"/>
+              </a:rPr>
+              <a:t>▶</a:t>
+            </a:r>
+            <a:endParaRPr lang="en-US" sz="2000" dirty="0"/>
+          </a:p>
+        </p:txBody>
+      </p:sp>
+      <p:sp>
+        <p:nvSpPr>
+          <p:cNvPr id="19" name="Text 17"/>
+          <p:cNvSpPr/>
+          <p:nvPr/>
+        </p:nvSpPr>
+        <p:spPr>
+          <a:xfrm>
+            <a:off x="1188720" y="3685032"/>
+            <a:ext cx="7132320" cy="411480"/>
+          </a:xfrm>
+          <a:prstGeom prst="rect">
+            <a:avLst/>
+          </a:prstGeom>
+          <a:noFill/>
+          <a:ln/>
+        </p:spPr>
+        <p:txBody>
+          <a:bodyPr wrap="square" rtlCol="0" anchor="ctr"/>
+          <a:lstStyle/>
+          <a:p>
+            <a:pPr indent="0" marL="0">
+              <a:buNone/>
+            </a:pPr>
+            <a:r>
+              <a:rPr lang="en-US" sz="1400" b="1" dirty="0">
+                <a:solidFill>
+                  <a:srgbClr val="1B2A4A"/>
+                </a:solidFill>
+                <a:latin typeface="Calibri" pitchFamily="34" charset="0"/>
+                <a:ea typeface="Calibri" pitchFamily="34" charset="-122"/>
+                <a:cs typeface="Calibri" pitchFamily="34" charset="-120"/>
+              </a:rPr>
+              <a:t>Interdependence in Ecosystems</a:t>
+            </a:r>
+            <a:endParaRPr lang="en-US" sz="1400" dirty="0"/>
+          </a:p>
+        </p:txBody>
+      </p:sp>
+      <p:sp>
+        <p:nvSpPr>
+          <p:cNvPr id="20" name="Text 18"/>
+          <p:cNvSpPr/>
+          <p:nvPr/>
+        </p:nvSpPr>
+        <p:spPr>
+          <a:xfrm>
+            <a:off x="1188720" y="4069080"/>
+            <a:ext cx="7132320" cy="320040"/>
+          </a:xfrm>
+          <a:prstGeom prst="rect">
+            <a:avLst/>
+          </a:prstGeom>
+          <a:noFill/>
+          <a:ln/>
+        </p:spPr>
+        <p:txBody>
+          <a:bodyPr wrap="square" rtlCol="0" anchor="ctr"/>
+          <a:lstStyle/>
+          <a:p>
+            <a:pPr indent="0" marL="0">
+              <a:buNone/>
+            </a:pPr>
+            <a:r>
+              <a:rPr lang="en-US" sz="1100" dirty="0">
+                <a:solidFill>
+                  <a:srgbClr val="6B6660"/>
+                </a:solidFill>
+                <a:latin typeface="Calibri" pitchFamily="34" charset="0"/>
+                <a:ea typeface="Calibri" pitchFamily="34" charset="-122"/>
+                <a:cs typeface="Calibri" pitchFamily="34" charset="-120"/>
+              </a:rPr>
+              <a:t>FuseSchool  •  4 min</a:t>
+            </a:r>
+            <a:endParaRPr lang="en-US" sz="1100" dirty="0"/>
+          </a:p>
+        </p:txBody>
+      </p:sp>
+    </p:spTree>
+  </p:cSld>
+  <p:clrMapOvr>
+    <a:masterClrMapping/>
+  </p:clrMapOvr>
+</p:sld>
+</file>
+
+<file path=ppt/slides/slide8.xml><?xml version="1.0" encoding="utf-8"?>
+<p:sld xmlns:a="http://schemas.openxmlformats.org/drawingml/2006/main" xmlns:r="http://schemas.openxmlformats.org/officeDocument/2006/relationships" xmlns:p="http://schemas.openxmlformats.org/presentationml/2006/main">
+  <p:cSld name="Slide 8">
+    <p:spTree>
+      <p:nvGrpSpPr>
+        <p:cNvPr id="1" name=""/>
+        <p:cNvGrpSpPr/>
+        <p:nvPr/>
+      </p:nvGrpSpPr>
+      <p:grpSpPr>
+        <a:xfrm>
+          <a:off x="0" y="0"/>
+          <a:ext cx="0" cy="0"/>
+          <a:chOff x="0" y="0"/>
+          <a:chExt cx="0" cy="0"/>
+        </a:xfrm>
+      </p:grpSpPr>
+      <p:sp>
+        <p:nvSpPr>
+          <p:cNvPr id="2" name="Shape 0"/>
+          <p:cNvSpPr/>
+          <p:nvPr/>
+        </p:nvSpPr>
+        <p:spPr>
+          <a:xfrm>
+            <a:off x="0" y="0"/>
+            <a:ext cx="9144000" cy="5143500"/>
+          </a:xfrm>
+          <a:prstGeom prst="rect">
+            <a:avLst/>
+          </a:prstGeom>
+          <a:solidFill>
+            <a:srgbClr val="1B2A4A"/>
+          </a:solidFill>
+          <a:ln/>
+        </p:spPr>
+      </p:sp>
+      <p:sp>
+        <p:nvSpPr>
+          <p:cNvPr id="3" name="Shape 1"/>
+          <p:cNvSpPr/>
+          <p:nvPr/>
+        </p:nvSpPr>
+        <p:spPr>
+          <a:xfrm>
+            <a:off x="0" y="4777740"/>
+            <a:ext cx="9144000" cy="365760"/>
+          </a:xfrm>
+          <a:prstGeom prst="rect">
+            <a:avLst/>
+          </a:prstGeom>
+          <a:solidFill>
+            <a:srgbClr val="E9C46A"/>
+          </a:solidFill>
+          <a:ln/>
+        </p:spPr>
+      </p:sp>
+      <p:sp>
+        <p:nvSpPr>
+          <p:cNvPr id="4" name="Text 2"/>
+          <p:cNvSpPr/>
+          <p:nvPr/>
+        </p:nvSpPr>
+        <p:spPr>
+          <a:xfrm>
+            <a:off x="731520" y="1371600"/>
+            <a:ext cx="7680960" cy="914400"/>
+          </a:xfrm>
+          <a:prstGeom prst="rect">
+            <a:avLst/>
+          </a:prstGeom>
+          <a:noFill/>
+          <a:ln/>
+        </p:spPr>
+        <p:txBody>
+          <a:bodyPr wrap="square" rtlCol="0" anchor="ctr"/>
+          <a:lstStyle/>
+          <a:p>
+            <a:pPr algn="ctr" indent="0" marL="0">
+              <a:buNone/>
+            </a:pPr>
+            <a:r>
+              <a:rPr lang="en-US" sz="3600" b="1" dirty="0">
+                <a:solidFill>
+                  <a:srgbClr val="FFFFFF"/>
+                </a:solidFill>
+                <a:latin typeface="Georgia" pitchFamily="34" charset="0"/>
+                <a:ea typeface="Georgia" pitchFamily="34" charset="-122"/>
+                <a:cs typeface="Georgia" pitchFamily="34" charset="-120"/>
+              </a:rPr>
+              <a:t>Review &amp; Practise</a:t>
+            </a:r>
+            <a:endParaRPr lang="en-US" sz="3600" dirty="0"/>
+          </a:p>
+        </p:txBody>
+      </p:sp>
+      <p:sp>
+        <p:nvSpPr>
+          <p:cNvPr id="5" name="Text 3"/>
+          <p:cNvSpPr/>
+          <p:nvPr/>
+        </p:nvSpPr>
+        <p:spPr>
+          <a:xfrm>
+            <a:off x="731520" y="2560320"/>
+            <a:ext cx="7680960" cy="548640"/>
+          </a:xfrm>
+          <a:prstGeom prst="rect">
+            <a:avLst/>
+          </a:prstGeom>
+          <a:noFill/>
+          <a:ln/>
+        </p:spPr>
+        <p:txBody>
+          <a:bodyPr wrap="square" rtlCol="0" anchor="ctr"/>
+          <a:lstStyle/>
+          <a:p>
+            <a:pPr algn="ctr" indent="0" marL="0">
+              <a:buNone/>
+            </a:pPr>
+            <a:r>
+              <a:rPr lang="en-US" sz="2000" dirty="0">
+                <a:solidFill>
+                  <a:srgbClr val="E9C46A"/>
+                </a:solidFill>
+                <a:latin typeface="Calibri" pitchFamily="34" charset="0"/>
+                <a:ea typeface="Calibri" pitchFamily="34" charset="-122"/>
+                <a:cs typeface="Calibri" pitchFamily="34" charset="-120"/>
+              </a:rPr>
               <a:t>mrzocchi.com</a:t>
             </a:r>
-            <a:endParaRPr lang="en-US" sz="1400" dirty="0"/>
+            <a:endParaRPr lang="en-US" sz="2000" dirty="0"/>
           </a:p>
         </p:txBody>
       </p:sp>
